--- a/public/fun/pack/pptx/family/가족소개_21_우리부부_대나무숲.pptx
+++ b/public/fun/pack/pptx/family/가족소개_21_우리부부_대나무숲.pptx
@@ -3347,7 +3347,7 @@
             <a:r>
               <a:rPr sz="3600" b="1" i="0">
                 <a:solidFill>
-                  <a:srgbClr val="1C3629"/>
+                  <a:srgbClr val="115F5B"/>
                 </a:solidFill>
               </a:rPr>
               <a:t>우리 가족을 소개합니다</a:t>
@@ -3385,7 +3385,7 @@
             <a:r>
               <a:rPr sz="1700" b="0" i="1">
                 <a:solidFill>
-                  <a:srgbClr val="1C3629"/>
+                  <a:srgbClr val="115F5B"/>
                 </a:solidFill>
               </a:rPr>
               <a:t>대나무 숲길을 팔짱 끼고</a:t>
@@ -3472,7 +3472,7 @@
             <a:avLst/>
           </a:prstGeom>
           <a:solidFill>
-            <a:srgbClr val="D5ECE0"/>
+            <a:srgbClr val="D1FAF8"/>
           </a:solidFill>
           <a:ln>
             <a:noFill/>
@@ -3501,7 +3501,7 @@
             <a:avLst/>
           </a:prstGeom>
           <a:solidFill>
-            <a:srgbClr val="396F54"/>
+            <a:srgbClr val="26C5BD"/>
           </a:solidFill>
           <a:ln>
             <a:noFill/>
@@ -3545,7 +3545,7 @@
             <a:r>
               <a:rPr sz="3000" b="1" i="0">
                 <a:solidFill>
-                  <a:srgbClr val="1C3629"/>
+                  <a:srgbClr val="115F5B"/>
                 </a:solidFill>
               </a:rPr>
               <a:t>가족 구성원</a:t>
@@ -3568,11 +3568,11 @@
             <a:avLst/>
           </a:prstGeom>
           <a:solidFill>
-            <a:srgbClr val="D5ECE0"/>
+            <a:srgbClr val="D1FAF8"/>
           </a:solidFill>
           <a:ln w="19050">
             <a:solidFill>
-              <a:srgbClr val="396F54"/>
+              <a:srgbClr val="26C5BD"/>
             </a:solidFill>
             <a:prstDash val="dash"/>
           </a:ln>
@@ -3591,7 +3591,7 @@
             <a:r>
               <a:rPr sz="1200" b="0" i="0">
                 <a:solidFill>
-                  <a:srgbClr val="1C3629"/>
+                  <a:srgbClr val="115F5B"/>
                 </a:solidFill>
               </a:rPr>
               <a:t>사진</a:t>
@@ -3629,7 +3629,7 @@
             <a:r>
               <a:rPr sz="1600" b="1" i="0">
                 <a:solidFill>
-                  <a:srgbClr val="1C3629"/>
+                  <a:srgbClr val="115F5B"/>
                 </a:solidFill>
               </a:rPr>
               <a:t>남편</a:t>
@@ -3720,11 +3720,11 @@
             <a:avLst/>
           </a:prstGeom>
           <a:solidFill>
-            <a:srgbClr val="D5ECE0"/>
+            <a:srgbClr val="D1FAF8"/>
           </a:solidFill>
           <a:ln w="19050">
             <a:solidFill>
-              <a:srgbClr val="396F54"/>
+              <a:srgbClr val="26C5BD"/>
             </a:solidFill>
             <a:prstDash val="dash"/>
           </a:ln>
@@ -3743,7 +3743,7 @@
             <a:r>
               <a:rPr sz="1200" b="0" i="0">
                 <a:solidFill>
-                  <a:srgbClr val="1C3629"/>
+                  <a:srgbClr val="115F5B"/>
                 </a:solidFill>
               </a:rPr>
               <a:t>사진</a:t>
@@ -3781,7 +3781,7 @@
             <a:r>
               <a:rPr sz="1600" b="1" i="0">
                 <a:solidFill>
-                  <a:srgbClr val="1C3629"/>
+                  <a:srgbClr val="115F5B"/>
                 </a:solidFill>
               </a:rPr>
               <a:t>아내</a:t>
@@ -3898,7 +3898,7 @@
             <a:avLst/>
           </a:prstGeom>
           <a:solidFill>
-            <a:srgbClr val="D5ECE0"/>
+            <a:srgbClr val="D1FAF8"/>
           </a:solidFill>
           <a:ln>
             <a:noFill/>
@@ -3927,7 +3927,7 @@
             <a:avLst/>
           </a:prstGeom>
           <a:solidFill>
-            <a:srgbClr val="396F54"/>
+            <a:srgbClr val="26C5BD"/>
           </a:solidFill>
           <a:ln>
             <a:noFill/>
@@ -3971,7 +3971,7 @@
             <a:r>
               <a:rPr sz="3000" b="1" i="0">
                 <a:solidFill>
-                  <a:srgbClr val="1C3629"/>
+                  <a:srgbClr val="115F5B"/>
                 </a:solidFill>
               </a:rPr>
               <a:t>우리 가족 이야기</a:t>
@@ -3994,7 +3994,7 @@
             <a:avLst/>
           </a:prstGeom>
           <a:solidFill>
-            <a:srgbClr val="D5ECE0"/>
+            <a:srgbClr val="D1FAF8"/>
           </a:solidFill>
           <a:ln>
             <a:noFill/>
@@ -4023,7 +4023,7 @@
             <a:avLst/>
           </a:prstGeom>
           <a:solidFill>
-            <a:srgbClr val="396F54"/>
+            <a:srgbClr val="26C5BD"/>
           </a:solidFill>
           <a:ln w="38100">
             <a:solidFill>
@@ -4069,7 +4069,7 @@
             <a:r>
               <a:rPr sz="1600" b="1" i="0">
                 <a:solidFill>
-                  <a:srgbClr val="396F54"/>
+                  <a:srgbClr val="26C5BD"/>
                 </a:solidFill>
               </a:rPr>
               <a:t>처음 만난 날</a:t>
@@ -4107,7 +4107,7 @@
             <a:r>
               <a:rPr sz="1800" b="1" i="0">
                 <a:solidFill>
-                  <a:srgbClr val="1C3629"/>
+                  <a:srgbClr val="115F5B"/>
                 </a:solidFill>
               </a:rPr>
               <a:t>첫 만남</a:t>
@@ -4168,7 +4168,7 @@
             <a:avLst/>
           </a:prstGeom>
           <a:solidFill>
-            <a:srgbClr val="396F54"/>
+            <a:srgbClr val="26C5BD"/>
           </a:solidFill>
           <a:ln w="38100">
             <a:solidFill>
@@ -4214,7 +4214,7 @@
             <a:r>
               <a:rPr sz="1600" b="1" i="0">
                 <a:solidFill>
-                  <a:srgbClr val="396F54"/>
+                  <a:srgbClr val="26C5BD"/>
                 </a:solidFill>
               </a:rPr>
               <a:t>결혼</a:t>
@@ -4252,7 +4252,7 @@
             <a:r>
               <a:rPr sz="1800" b="1" i="0">
                 <a:solidFill>
-                  <a:srgbClr val="1C3629"/>
+                  <a:srgbClr val="115F5B"/>
                 </a:solidFill>
               </a:rPr>
               <a:t>함께 시작한 날</a:t>
@@ -4313,7 +4313,7 @@
             <a:avLst/>
           </a:prstGeom>
           <a:solidFill>
-            <a:srgbClr val="396F54"/>
+            <a:srgbClr val="26C5BD"/>
           </a:solidFill>
           <a:ln w="38100">
             <a:solidFill>
@@ -4359,7 +4359,7 @@
             <a:r>
               <a:rPr sz="1600" b="1" i="0">
                 <a:solidFill>
-                  <a:srgbClr val="396F54"/>
+                  <a:srgbClr val="26C5BD"/>
                 </a:solidFill>
               </a:rPr>
               <a:t>첫 집</a:t>
@@ -4397,7 +4397,7 @@
             <a:r>
               <a:rPr sz="1800" b="1" i="0">
                 <a:solidFill>
-                  <a:srgbClr val="1C3629"/>
+                  <a:srgbClr val="115F5B"/>
                 </a:solidFill>
               </a:rPr>
               <a:t>우리의 보금자리</a:t>
@@ -4458,7 +4458,7 @@
             <a:avLst/>
           </a:prstGeom>
           <a:solidFill>
-            <a:srgbClr val="396F54"/>
+            <a:srgbClr val="26C5BD"/>
           </a:solidFill>
           <a:ln w="38100">
             <a:solidFill>
@@ -4504,7 +4504,7 @@
             <a:r>
               <a:rPr sz="1600" b="1" i="0">
                 <a:solidFill>
-                  <a:srgbClr val="396F54"/>
+                  <a:srgbClr val="26C5BD"/>
                 </a:solidFill>
               </a:rPr>
               <a:t>지금</a:t>
@@ -4542,7 +4542,7 @@
             <a:r>
               <a:rPr sz="1800" b="1" i="0">
                 <a:solidFill>
-                  <a:srgbClr val="1C3629"/>
+                  <a:srgbClr val="115F5B"/>
                 </a:solidFill>
               </a:rPr>
               <a:t>오늘의 우리</a:t>
@@ -4629,7 +4629,7 @@
             <a:avLst/>
           </a:prstGeom>
           <a:solidFill>
-            <a:srgbClr val="D5ECE0"/>
+            <a:srgbClr val="D1FAF8"/>
           </a:solidFill>
           <a:ln>
             <a:noFill/>
@@ -4658,7 +4658,7 @@
             <a:avLst/>
           </a:prstGeom>
           <a:solidFill>
-            <a:srgbClr val="396F54"/>
+            <a:srgbClr val="26C5BD"/>
           </a:solidFill>
           <a:ln>
             <a:noFill/>
@@ -4702,7 +4702,7 @@
             <a:r>
               <a:rPr sz="3000" b="1" i="0">
                 <a:solidFill>
-                  <a:srgbClr val="1C3629"/>
+                  <a:srgbClr val="115F5B"/>
                 </a:solidFill>
               </a:rPr>
               <a:t>우리 가족의 약속</a:t>
@@ -4727,11 +4727,11 @@
             </a:avLst>
           </a:prstGeom>
           <a:solidFill>
-            <a:srgbClr val="F2F8F5"/>
+            <a:srgbClr val="EEFCFB"/>
           </a:solidFill>
           <a:ln w="12700">
             <a:solidFill>
-              <a:srgbClr val="D5ECE0"/>
+              <a:srgbClr val="D1FAF8"/>
             </a:solidFill>
           </a:ln>
         </p:spPr>
@@ -4758,7 +4758,7 @@
             <a:avLst/>
           </a:prstGeom>
           <a:solidFill>
-            <a:srgbClr val="396F54"/>
+            <a:srgbClr val="26C5BD"/>
           </a:solidFill>
           <a:ln>
             <a:noFill/>
@@ -4816,7 +4816,7 @@
             <a:r>
               <a:rPr sz="1800" b="1" i="0">
                 <a:solidFill>
-                  <a:srgbClr val="1C3629"/>
+                  <a:srgbClr val="115F5B"/>
                 </a:solidFill>
               </a:rPr>
               <a:t>약속 1</a:t>
@@ -4879,11 +4879,11 @@
             </a:avLst>
           </a:prstGeom>
           <a:solidFill>
-            <a:srgbClr val="F2F8F5"/>
+            <a:srgbClr val="EEFCFB"/>
           </a:solidFill>
           <a:ln w="12700">
             <a:solidFill>
-              <a:srgbClr val="D5ECE0"/>
+              <a:srgbClr val="D1FAF8"/>
             </a:solidFill>
           </a:ln>
         </p:spPr>
@@ -4910,7 +4910,7 @@
             <a:avLst/>
           </a:prstGeom>
           <a:solidFill>
-            <a:srgbClr val="396F54"/>
+            <a:srgbClr val="26C5BD"/>
           </a:solidFill>
           <a:ln>
             <a:noFill/>
@@ -4968,7 +4968,7 @@
             <a:r>
               <a:rPr sz="1800" b="1" i="0">
                 <a:solidFill>
-                  <a:srgbClr val="1C3629"/>
+                  <a:srgbClr val="115F5B"/>
                 </a:solidFill>
               </a:rPr>
               <a:t>약속 2</a:t>
@@ -5031,11 +5031,11 @@
             </a:avLst>
           </a:prstGeom>
           <a:solidFill>
-            <a:srgbClr val="F2F8F5"/>
+            <a:srgbClr val="EEFCFB"/>
           </a:solidFill>
           <a:ln w="12700">
             <a:solidFill>
-              <a:srgbClr val="D5ECE0"/>
+              <a:srgbClr val="D1FAF8"/>
             </a:solidFill>
           </a:ln>
         </p:spPr>
@@ -5062,7 +5062,7 @@
             <a:avLst/>
           </a:prstGeom>
           <a:solidFill>
-            <a:srgbClr val="396F54"/>
+            <a:srgbClr val="26C5BD"/>
           </a:solidFill>
           <a:ln>
             <a:noFill/>
@@ -5120,7 +5120,7 @@
             <a:r>
               <a:rPr sz="1800" b="1" i="0">
                 <a:solidFill>
-                  <a:srgbClr val="1C3629"/>
+                  <a:srgbClr val="115F5B"/>
                 </a:solidFill>
               </a:rPr>
               <a:t>약속 3</a:t>
@@ -5207,7 +5207,7 @@
             <a:avLst/>
           </a:prstGeom>
           <a:solidFill>
-            <a:srgbClr val="D5ECE0"/>
+            <a:srgbClr val="D1FAF8"/>
           </a:solidFill>
           <a:ln>
             <a:noFill/>
@@ -5236,7 +5236,7 @@
             <a:avLst/>
           </a:prstGeom>
           <a:solidFill>
-            <a:srgbClr val="396F54"/>
+            <a:srgbClr val="26C5BD"/>
           </a:solidFill>
           <a:ln>
             <a:noFill/>
@@ -5280,7 +5280,7 @@
             <a:r>
               <a:rPr sz="3000" b="1" i="0">
                 <a:solidFill>
-                  <a:srgbClr val="1C3629"/>
+                  <a:srgbClr val="115F5B"/>
                 </a:solidFill>
               </a:rPr>
               <a:t>가족 사진</a:t>
@@ -5305,11 +5305,11 @@
             </a:avLst>
           </a:prstGeom>
           <a:solidFill>
-            <a:srgbClr val="D5ECE0"/>
+            <a:srgbClr val="D1FAF8"/>
           </a:solidFill>
           <a:ln w="19050">
             <a:solidFill>
-              <a:srgbClr val="396F54"/>
+              <a:srgbClr val="26C5BD"/>
             </a:solidFill>
             <a:prstDash val="dash"/>
           </a:ln>
@@ -5328,7 +5328,7 @@
             <a:r>
               <a:rPr sz="1200" b="0" i="0">
                 <a:solidFill>
-                  <a:srgbClr val="1C3629"/>
+                  <a:srgbClr val="115F5B"/>
                 </a:solidFill>
               </a:rPr>
               <a:t>사진 1</a:t>
@@ -5353,11 +5353,11 @@
             </a:avLst>
           </a:prstGeom>
           <a:solidFill>
-            <a:srgbClr val="D5ECE0"/>
+            <a:srgbClr val="D1FAF8"/>
           </a:solidFill>
           <a:ln w="19050">
             <a:solidFill>
-              <a:srgbClr val="396F54"/>
+              <a:srgbClr val="26C5BD"/>
             </a:solidFill>
             <a:prstDash val="dash"/>
           </a:ln>
@@ -5376,7 +5376,7 @@
             <a:r>
               <a:rPr sz="1200" b="0" i="0">
                 <a:solidFill>
-                  <a:srgbClr val="1C3629"/>
+                  <a:srgbClr val="115F5B"/>
                 </a:solidFill>
               </a:rPr>
               <a:t>사진 2</a:t>
@@ -5401,11 +5401,11 @@
             </a:avLst>
           </a:prstGeom>
           <a:solidFill>
-            <a:srgbClr val="D5ECE0"/>
+            <a:srgbClr val="D1FAF8"/>
           </a:solidFill>
           <a:ln w="19050">
             <a:solidFill>
-              <a:srgbClr val="396F54"/>
+              <a:srgbClr val="26C5BD"/>
             </a:solidFill>
             <a:prstDash val="dash"/>
           </a:ln>
@@ -5424,7 +5424,7 @@
             <a:r>
               <a:rPr sz="1200" b="0" i="0">
                 <a:solidFill>
-                  <a:srgbClr val="1C3629"/>
+                  <a:srgbClr val="115F5B"/>
                 </a:solidFill>
               </a:rPr>
               <a:t>사진 3</a:t>
@@ -5449,11 +5449,11 @@
             </a:avLst>
           </a:prstGeom>
           <a:solidFill>
-            <a:srgbClr val="D5ECE0"/>
+            <a:srgbClr val="D1FAF8"/>
           </a:solidFill>
           <a:ln w="19050">
             <a:solidFill>
-              <a:srgbClr val="396F54"/>
+              <a:srgbClr val="26C5BD"/>
             </a:solidFill>
             <a:prstDash val="dash"/>
           </a:ln>
@@ -5472,7 +5472,7 @@
             <a:r>
               <a:rPr sz="1200" b="0" i="0">
                 <a:solidFill>
-                  <a:srgbClr val="1C3629"/>
+                  <a:srgbClr val="115F5B"/>
                 </a:solidFill>
               </a:rPr>
               <a:t>사진 4</a:t>
@@ -5497,11 +5497,11 @@
             </a:avLst>
           </a:prstGeom>
           <a:solidFill>
-            <a:srgbClr val="D5ECE0"/>
+            <a:srgbClr val="D1FAF8"/>
           </a:solidFill>
           <a:ln w="19050">
             <a:solidFill>
-              <a:srgbClr val="396F54"/>
+              <a:srgbClr val="26C5BD"/>
             </a:solidFill>
             <a:prstDash val="dash"/>
           </a:ln>
@@ -5520,7 +5520,7 @@
             <a:r>
               <a:rPr sz="1200" b="0" i="0">
                 <a:solidFill>
-                  <a:srgbClr val="1C3629"/>
+                  <a:srgbClr val="115F5B"/>
                 </a:solidFill>
               </a:rPr>
               <a:t>사진 5</a:t>
@@ -5545,11 +5545,11 @@
             </a:avLst>
           </a:prstGeom>
           <a:solidFill>
-            <a:srgbClr val="D5ECE0"/>
+            <a:srgbClr val="D1FAF8"/>
           </a:solidFill>
           <a:ln w="19050">
             <a:solidFill>
-              <a:srgbClr val="396F54"/>
+              <a:srgbClr val="26C5BD"/>
             </a:solidFill>
             <a:prstDash val="dash"/>
           </a:ln>
@@ -5568,7 +5568,7 @@
             <a:r>
               <a:rPr sz="1200" b="0" i="0">
                 <a:solidFill>
-                  <a:srgbClr val="1C3629"/>
+                  <a:srgbClr val="115F5B"/>
                 </a:solidFill>
               </a:rPr>
               <a:t>사진 6</a:t>
@@ -5648,7 +5648,7 @@
             <a:r>
               <a:rPr sz="3600" b="1" i="0">
                 <a:solidFill>
-                  <a:srgbClr val="1C3629"/>
+                  <a:srgbClr val="115F5B"/>
                 </a:solidFill>
               </a:rPr>
               <a:t>우리 가족 소개를 마칩니다</a:t>
@@ -5686,7 +5686,7 @@
             <a:r>
               <a:rPr sz="1700" b="0" i="1">
                 <a:solidFill>
-                  <a:srgbClr val="1C3629"/>
+                  <a:srgbClr val="115F5B"/>
                 </a:solidFill>
               </a:rPr>
               <a:t>읽어 주셔서 고맙습니다</a:t>
@@ -5751,34 +5751,34 @@
         <a:sysClr val="window" lastClr="FFFFFF"/>
       </a:lt1>
       <a:dk2>
-        <a:srgbClr val="1C3629"/>
+        <a:srgbClr val="115F5B"/>
       </a:dk2>
       <a:lt2>
-        <a:srgbClr val="F2F8F5"/>
+        <a:srgbClr val="EEFCFB"/>
       </a:lt2>
       <a:accent1>
-        <a:srgbClr val="396F54"/>
+        <a:srgbClr val="26C5BD"/>
       </a:accent1>
       <a:accent2>
-        <a:srgbClr val="874587"/>
+        <a:srgbClr val="209DB6"/>
       </a:accent2>
       <a:accent3>
-        <a:srgbClr val="1C3629"/>
+        <a:srgbClr val="115F5B"/>
       </a:accent3>
       <a:accent4>
-        <a:srgbClr val="D5ECE0"/>
+        <a:srgbClr val="D1FAF8"/>
       </a:accent4>
       <a:accent5>
-        <a:srgbClr val="605A6E"/>
+        <a:srgbClr val="23B1BA"/>
       </a:accent5>
       <a:accent6>
-        <a:srgbClr val="77867F"/>
+        <a:srgbClr val="709F9D"/>
       </a:accent6>
       <a:hlink>
-        <a:srgbClr val="396F54"/>
+        <a:srgbClr val="26C5BD"/>
       </a:hlink>
       <a:folHlink>
-        <a:srgbClr val="1C3629"/>
+        <a:srgbClr val="115F5B"/>
       </a:folHlink>
     </a:clrScheme>
     <a:fontScheme name="Office">

--- a/public/fun/pack/pptx/family/가족소개_21_우리부부_대나무숲.pptx
+++ b/public/fun/pack/pptx/family/가족소개_21_우리부부_대나무숲.pptx
@@ -3286,6 +3286,14 @@
 <file path=ppt/slides/slide1.xml><?xml version="1.0" encoding="utf-8"?>
 <p:sld xmlns:a="http://schemas.openxmlformats.org/drawingml/2006/main" xmlns:p="http://schemas.openxmlformats.org/presentationml/2006/main" xmlns:r="http://schemas.openxmlformats.org/officeDocument/2006/relationships">
   <p:cSld>
+    <p:bg>
+      <p:bgPr>
+        <a:solidFill>
+          <a:srgbClr val="EAFDF4"/>
+        </a:solidFill>
+        <a:effectLst/>
+      </p:bgPr>
+    </p:bg>
     <p:spTree>
       <p:nvGrpSpPr>
         <p:cNvPr id="1" name=""/>
@@ -3293,30 +3301,120 @@
         <p:nvPr/>
       </p:nvGrpSpPr>
       <p:grpSpPr/>
-      <p:pic>
-        <p:nvPicPr>
-          <p:cNvPr id="3" name="표지 그림" descr="family-21.jpg"/>
-          <p:cNvPicPr>
-            <a:picLocks noChangeAspect="1"/>
-          </p:cNvPicPr>
+      <p:sp>
+        <p:nvSpPr>
+          <p:cNvPr id="3" name="사진 자리"/>
+          <p:cNvSpPr/>
           <p:nvPr/>
-        </p:nvPicPr>
-        <p:blipFill>
-          <a:blip r:embed="rId2"/>
-          <a:stretch>
-            <a:fillRect/>
-          </a:stretch>
-        </p:blipFill>
-        <p:spPr>
-          <a:xfrm>
-            <a:off x="0" y="0"/>
-            <a:ext cx="12191695" cy="6858000"/>
+        </p:nvSpPr>
+        <p:spPr>
+          <a:xfrm>
+            <a:off x="7071183" y="960120"/>
+            <a:ext cx="3657508" cy="4526280"/>
+          </a:xfrm>
+          <a:prstGeom prst="roundRect">
+            <a:avLst>
+              <a:gd name="adj" fmla="val 4000"/>
+            </a:avLst>
+          </a:prstGeom>
+          <a:solidFill>
+            <a:srgbClr val="A5F3CC"/>
+          </a:solidFill>
+          <a:ln>
+            <a:noFill/>
+          </a:ln>
+        </p:spPr>
+        <p:txBody>
+          <a:bodyPr rtlCol="0" anchor="ctr" wrap="square" lIns="54864" rIns="54864" tIns="27432" bIns="27432">
+            <a:noAutofit/>
+          </a:bodyPr>
+          <a:lstStyle/>
+          <a:p>
+            <a:pPr algn="ctr">
+              <a:lnSpc>
+                <a:spcPct val="100000"/>
+              </a:lnSpc>
+            </a:pPr>
+            <a:r>
+              <a:rPr sz="1400" b="0" i="0">
+                <a:solidFill>
+                  <a:srgbClr val="274938"/>
+                </a:solidFill>
+              </a:rPr>
+              <a:t>사진을 넣어 주세요</a:t>
+            </a:r>
+          </a:p>
+        </p:txBody>
+      </p:sp>
+      <p:sp>
+        <p:nvSpPr>
+          <p:cNvPr id="4" name="장식"/>
+          <p:cNvSpPr/>
+          <p:nvPr/>
+        </p:nvSpPr>
+        <p:spPr>
+          <a:xfrm>
+            <a:off x="7558851" y="1234439"/>
+            <a:ext cx="3657508" cy="4526280"/>
+          </a:xfrm>
+          <a:prstGeom prst="roundRect">
+            <a:avLst>
+              <a:gd name="adj" fmla="val 4000"/>
+            </a:avLst>
+          </a:prstGeom>
+          <a:noFill/>
+          <a:ln w="9525">
+            <a:solidFill>
+              <a:srgbClr val="26231F"/>
+            </a:solidFill>
+          </a:ln>
+        </p:spPr>
+        <p:txBody>
+          <a:bodyPr rtlCol="0" anchor="ctr"/>
+          <a:lstStyle/>
+          <a:p>
+            <a:pPr algn="ctr"/>
+          </a:p>
+        </p:txBody>
+      </p:sp>
+      <p:sp>
+        <p:nvSpPr>
+          <p:cNvPr id="5" name="라벨"/>
+          <p:cNvSpPr txBox="1"/>
+          <p:nvPr/>
+        </p:nvSpPr>
+        <p:spPr>
+          <a:xfrm>
+            <a:off x="822960" y="2148840"/>
+            <a:ext cx="5608179" cy="274320"/>
           </a:xfrm>
           <a:prstGeom prst="rect">
             <a:avLst/>
           </a:prstGeom>
-        </p:spPr>
-      </p:pic>
+          <a:noFill/>
+        </p:spPr>
+        <p:txBody>
+          <a:bodyPr wrap="square" lIns="54864" rIns="54864" tIns="27432" bIns="27432" anchor="t">
+            <a:noAutofit/>
+          </a:bodyPr>
+          <a:lstStyle/>
+          <a:p>
+            <a:pPr algn="l">
+              <a:lnSpc>
+                <a:spcPct val="115000"/>
+              </a:lnSpc>
+            </a:pPr>
+            <a:r>
+              <a:rPr sz="1000" b="1" i="0" spc="250">
+                <a:solidFill>
+                  <a:srgbClr val="26231F"/>
+                </a:solidFill>
+              </a:rPr>
+              <a:t>FAMILY ALBUM</a:t>
+            </a:r>
+          </a:p>
+        </p:txBody>
+      </p:sp>
       <p:sp>
         <p:nvSpPr>
           <p:cNvPr id="2" name="Title 1"/>
@@ -3329,8 +3427,8 @@
         </p:nvSpPr>
         <p:spPr>
           <a:xfrm>
-            <a:off x="853418" y="2057400"/>
-            <a:ext cx="6095847" cy="1554480"/>
+            <a:off x="822960" y="2606040"/>
+            <a:ext cx="5608179" cy="1188720"/>
           </a:xfrm>
         </p:spPr>
         <p:txBody>
@@ -3345,9 +3443,9 @@
               </a:lnSpc>
             </a:pPr>
             <a:r>
-              <a:rPr sz="3600" b="1" i="0">
-                <a:solidFill>
-                  <a:srgbClr val="115F5B"/>
+              <a:rPr sz="4000" b="1" i="0">
+                <a:solidFill>
+                  <a:srgbClr val="26231F"/>
                 </a:solidFill>
               </a:rPr>
               <a:t>우리 가족을 소개합니다</a:t>
@@ -3357,14 +3455,14 @@
       </p:sp>
       <p:sp>
         <p:nvSpPr>
-          <p:cNvPr id="4" name="한 줄 문구"/>
+          <p:cNvPr id="6" name="한 줄 문구"/>
           <p:cNvSpPr txBox="1"/>
           <p:nvPr/>
         </p:nvSpPr>
         <p:spPr>
           <a:xfrm>
-            <a:off x="853418" y="3749039"/>
-            <a:ext cx="6095847" cy="822960"/>
+            <a:off x="822960" y="3886200"/>
+            <a:ext cx="5608179" cy="822960"/>
           </a:xfrm>
           <a:prstGeom prst="rect">
             <a:avLst/>
@@ -3383,9 +3481,9 @@
               </a:lnSpc>
             </a:pPr>
             <a:r>
-              <a:rPr sz="1700" b="0" i="1">
-                <a:solidFill>
-                  <a:srgbClr val="115F5B"/>
+              <a:rPr sz="1700" b="0" i="0">
+                <a:solidFill>
+                  <a:srgbClr val="26231F"/>
                 </a:solidFill>
               </a:rPr>
               <a:t>대나무 숲길을 팔짱 끼고</a:t>
@@ -3395,14 +3493,14 @@
       </p:sp>
       <p:sp>
         <p:nvSpPr>
-          <p:cNvPr id="5" name="안내 문구"/>
+          <p:cNvPr id="7" name="안내 문구"/>
           <p:cNvSpPr txBox="1"/>
           <p:nvPr/>
         </p:nvSpPr>
         <p:spPr>
           <a:xfrm>
-            <a:off x="853418" y="4617720"/>
-            <a:ext cx="6095847" cy="914400"/>
+            <a:off x="822960" y="4754880"/>
+            <a:ext cx="5608179" cy="914400"/>
           </a:xfrm>
           <a:prstGeom prst="rect">
             <a:avLst/>
@@ -3423,10 +3521,10 @@
             <a:r>
               <a:rPr sz="1400" b="0" i="0">
                 <a:solidFill>
-                  <a:srgbClr val="666666"/>
+                  <a:srgbClr val="26231F"/>
                 </a:solidFill>
               </a:rPr>
-              <a:t>우리 부부 · 2027. 00. 00</a:t>
+              <a:t>우리 부부 · 날짜 입력</a:t>
             </a:r>
           </a:p>
         </p:txBody>
@@ -3445,7 +3543,7 @@
     <p:bg>
       <p:bgPr>
         <a:solidFill>
-          <a:srgbClr val="FFFFFF"/>
+          <a:srgbClr val="EAFDF4"/>
         </a:solidFill>
         <a:effectLst/>
       </p:bgPr>
@@ -3459,20 +3557,20 @@
       <p:grpSpPr/>
       <p:sp>
         <p:nvSpPr>
-          <p:cNvPr id="3" name="장식"/>
+          <p:cNvPr id="3" name="포인트"/>
           <p:cNvSpPr/>
           <p:nvPr/>
         </p:nvSpPr>
         <p:spPr>
           <a:xfrm>
-            <a:off x="-182880" y="6144768"/>
-            <a:ext cx="12557455" cy="731520"/>
-          </a:xfrm>
-          <a:prstGeom prst="wave">
+            <a:off x="5958687" y="246888"/>
+            <a:ext cx="274320" cy="274320"/>
+          </a:xfrm>
+          <a:prstGeom prst="mathPlus">
             <a:avLst/>
           </a:prstGeom>
           <a:solidFill>
-            <a:srgbClr val="D1FAF8"/>
+            <a:srgbClr val="7BEAB3"/>
           </a:solidFill>
           <a:ln>
             <a:noFill/>
@@ -3494,14 +3592,14 @@
         </p:nvSpPr>
         <p:spPr>
           <a:xfrm>
-            <a:off x="-182880" y="6400800"/>
-            <a:ext cx="12557455" cy="502920"/>
-          </a:xfrm>
-          <a:prstGeom prst="wave">
+            <a:off x="5684367" y="1572768"/>
+            <a:ext cx="822960" cy="22860"/>
+          </a:xfrm>
+          <a:prstGeom prst="rect">
             <a:avLst/>
           </a:prstGeom>
           <a:solidFill>
-            <a:srgbClr val="26C5BD"/>
+            <a:srgbClr val="7BEAB3"/>
           </a:solidFill>
           <a:ln>
             <a:noFill/>
@@ -3517,19 +3615,19 @@
       </p:sp>
       <p:sp>
         <p:nvSpPr>
-          <p:cNvPr id="2" name="Title 1"/>
-          <p:cNvSpPr>
-            <a:spLocks noGrp="1"/>
-          </p:cNvSpPr>
-          <p:nvPr>
-            <p:ph type="title"/>
-          </p:nvPr>
-        </p:nvSpPr>
-        <p:spPr>
-          <a:xfrm>
-            <a:off x="640080" y="457200"/>
-            <a:ext cx="9722815" cy="868680"/>
-          </a:xfrm>
+          <p:cNvPr id="5" name="상단 라벨"/>
+          <p:cNvSpPr txBox="1"/>
+          <p:nvPr/>
+        </p:nvSpPr>
+        <p:spPr>
+          <a:xfrm>
+            <a:off x="640080" y="182880"/>
+            <a:ext cx="3657600" cy="274320"/>
+          </a:xfrm>
+          <a:prstGeom prst="rect">
+            <a:avLst/>
+          </a:prstGeom>
+          <a:noFill/>
         </p:spPr>
         <p:txBody>
           <a:bodyPr wrap="square" lIns="54864" rIns="54864" tIns="27432" bIns="27432" anchor="ctr">
@@ -3538,6 +3636,44 @@
           <a:lstStyle/>
           <a:p>
             <a:pPr algn="l">
+              <a:lnSpc>
+                <a:spcPct val="115000"/>
+              </a:lnSpc>
+            </a:pPr>
+            <a:r>
+              <a:rPr sz="800" b="1" i="0" spc="250">
+                <a:solidFill>
+                  <a:srgbClr val="8E8780"/>
+                </a:solidFill>
+              </a:rPr>
+              <a:t>FAMILY ALBUM</a:t>
+            </a:r>
+          </a:p>
+        </p:txBody>
+      </p:sp>
+      <p:sp>
+        <p:nvSpPr>
+          <p:cNvPr id="2" name="Title 1"/>
+          <p:cNvSpPr>
+            <a:spLocks noGrp="1"/>
+          </p:cNvSpPr>
+          <p:nvPr>
+            <p:ph type="title"/>
+          </p:nvPr>
+        </p:nvSpPr>
+        <p:spPr>
+          <a:xfrm>
+            <a:off x="1371600" y="640080"/>
+            <a:ext cx="9448495" cy="868680"/>
+          </a:xfrm>
+        </p:spPr>
+        <p:txBody>
+          <a:bodyPr wrap="square" lIns="54864" rIns="54864" tIns="27432" bIns="27432" anchor="ctr">
+            <a:noAutofit/>
+          </a:bodyPr>
+          <a:lstStyle/>
+          <a:p>
+            <a:pPr algn="ctr">
               <a:lnSpc>
                 <a:spcPct val="105000"/>
               </a:lnSpc>
@@ -3545,7 +3681,7 @@
             <a:r>
               <a:rPr sz="3000" b="1" i="0">
                 <a:solidFill>
-                  <a:srgbClr val="115F5B"/>
+                  <a:srgbClr val="26231F"/>
                 </a:solidFill>
               </a:rPr>
               <a:t>가족 구성원</a:t>
@@ -3555,25 +3691,23 @@
       </p:sp>
       <p:sp>
         <p:nvSpPr>
-          <p:cNvPr id="5" name="사진 자리"/>
+          <p:cNvPr id="6" name="사진 자리"/>
           <p:cNvSpPr/>
           <p:nvPr/>
         </p:nvSpPr>
         <p:spPr>
           <a:xfrm>
-            <a:off x="2213533" y="1554480"/>
-            <a:ext cx="2194560" cy="2194560"/>
+            <a:off x="2167813" y="1783080"/>
+            <a:ext cx="2286000" cy="2286000"/>
           </a:xfrm>
           <a:prstGeom prst="ellipse">
             <a:avLst/>
           </a:prstGeom>
           <a:solidFill>
-            <a:srgbClr val="D1FAF8"/>
+            <a:srgbClr val="D1FAE6"/>
           </a:solidFill>
           <a:ln w="19050">
-            <a:solidFill>
-              <a:srgbClr val="26C5BD"/>
-            </a:solidFill>
+            <a:noFill/>
             <a:prstDash val="dash"/>
           </a:ln>
         </p:spPr>
@@ -3591,7 +3725,7 @@
             <a:r>
               <a:rPr sz="1200" b="0" i="0">
                 <a:solidFill>
-                  <a:srgbClr val="115F5B"/>
+                  <a:srgbClr val="8E8780"/>
                 </a:solidFill>
               </a:rPr>
               <a:t>사진</a:t>
@@ -3601,13 +3735,13 @@
       </p:sp>
       <p:sp>
         <p:nvSpPr>
-          <p:cNvPr id="6" name="TextBox 5"/>
+          <p:cNvPr id="7" name="TextBox 6"/>
           <p:cNvSpPr txBox="1"/>
           <p:nvPr/>
         </p:nvSpPr>
         <p:spPr>
           <a:xfrm>
-            <a:off x="640080" y="3840479"/>
+            <a:off x="640080" y="4160520"/>
             <a:ext cx="5341467" cy="411480"/>
           </a:xfrm>
           <a:prstGeom prst="rect">
@@ -3629,7 +3763,7 @@
             <a:r>
               <a:rPr sz="1600" b="1" i="0">
                 <a:solidFill>
-                  <a:srgbClr val="115F5B"/>
+                  <a:srgbClr val="274938"/>
                 </a:solidFill>
               </a:rPr>
               <a:t>남편</a:t>
@@ -3639,14 +3773,14 @@
       </p:sp>
       <p:sp>
         <p:nvSpPr>
-          <p:cNvPr id="7" name="TextBox 6"/>
+          <p:cNvPr id="8" name="TextBox 7"/>
           <p:cNvSpPr txBox="1"/>
           <p:nvPr/>
         </p:nvSpPr>
         <p:spPr>
           <a:xfrm>
-            <a:off x="731519" y="4297679"/>
-            <a:ext cx="5158587" cy="1645919"/>
+            <a:off x="731519" y="4617720"/>
+            <a:ext cx="5158587" cy="1737360"/>
           </a:xfrm>
           <a:prstGeom prst="rect">
             <a:avLst/>
@@ -3707,25 +3841,23 @@
       </p:sp>
       <p:sp>
         <p:nvSpPr>
-          <p:cNvPr id="8" name="사진 자리"/>
+          <p:cNvPr id="9" name="사진 자리"/>
           <p:cNvSpPr/>
           <p:nvPr/>
         </p:nvSpPr>
         <p:spPr>
           <a:xfrm>
-            <a:off x="7783601" y="1554480"/>
-            <a:ext cx="2194560" cy="2194560"/>
+            <a:off x="7737881" y="1783080"/>
+            <a:ext cx="2286000" cy="2286000"/>
           </a:xfrm>
           <a:prstGeom prst="ellipse">
             <a:avLst/>
           </a:prstGeom>
           <a:solidFill>
-            <a:srgbClr val="D1FAF8"/>
+            <a:srgbClr val="D1FAE6"/>
           </a:solidFill>
           <a:ln w="19050">
-            <a:solidFill>
-              <a:srgbClr val="26C5BD"/>
-            </a:solidFill>
+            <a:noFill/>
             <a:prstDash val="dash"/>
           </a:ln>
         </p:spPr>
@@ -3743,7 +3875,7 @@
             <a:r>
               <a:rPr sz="1200" b="0" i="0">
                 <a:solidFill>
-                  <a:srgbClr val="115F5B"/>
+                  <a:srgbClr val="8E8780"/>
                 </a:solidFill>
               </a:rPr>
               <a:t>사진</a:t>
@@ -3753,13 +3885,13 @@
       </p:sp>
       <p:sp>
         <p:nvSpPr>
-          <p:cNvPr id="9" name="TextBox 8"/>
+          <p:cNvPr id="10" name="TextBox 9"/>
           <p:cNvSpPr txBox="1"/>
           <p:nvPr/>
         </p:nvSpPr>
         <p:spPr>
           <a:xfrm>
-            <a:off x="6210147" y="3840479"/>
+            <a:off x="6210147" y="4160520"/>
             <a:ext cx="5341467" cy="411480"/>
           </a:xfrm>
           <a:prstGeom prst="rect">
@@ -3781,7 +3913,7 @@
             <a:r>
               <a:rPr sz="1600" b="1" i="0">
                 <a:solidFill>
-                  <a:srgbClr val="115F5B"/>
+                  <a:srgbClr val="274938"/>
                 </a:solidFill>
               </a:rPr>
               <a:t>아내</a:t>
@@ -3791,14 +3923,14 @@
       </p:sp>
       <p:sp>
         <p:nvSpPr>
-          <p:cNvPr id="10" name="TextBox 9"/>
+          <p:cNvPr id="11" name="TextBox 10"/>
           <p:cNvSpPr txBox="1"/>
           <p:nvPr/>
         </p:nvSpPr>
         <p:spPr>
           <a:xfrm>
-            <a:off x="6301587" y="4297679"/>
-            <a:ext cx="5158587" cy="1645919"/>
+            <a:off x="6301587" y="4617720"/>
+            <a:ext cx="5158587" cy="1737360"/>
           </a:xfrm>
           <a:prstGeom prst="rect">
             <a:avLst/>
@@ -3871,7 +4003,7 @@
     <p:bg>
       <p:bgPr>
         <a:solidFill>
-          <a:srgbClr val="FFFFFF"/>
+          <a:srgbClr val="EAFDF4"/>
         </a:solidFill>
         <a:effectLst/>
       </p:bgPr>
@@ -3885,20 +4017,20 @@
       <p:grpSpPr/>
       <p:sp>
         <p:nvSpPr>
-          <p:cNvPr id="3" name="장식"/>
+          <p:cNvPr id="3" name="포인트"/>
           <p:cNvSpPr/>
           <p:nvPr/>
         </p:nvSpPr>
         <p:spPr>
           <a:xfrm>
-            <a:off x="-182880" y="6144768"/>
-            <a:ext cx="12557455" cy="731520"/>
-          </a:xfrm>
-          <a:prstGeom prst="wave">
+            <a:off x="5958687" y="246888"/>
+            <a:ext cx="274320" cy="274320"/>
+          </a:xfrm>
+          <a:prstGeom prst="mathPlus">
             <a:avLst/>
           </a:prstGeom>
           <a:solidFill>
-            <a:srgbClr val="D1FAF8"/>
+            <a:srgbClr val="7BEAB3"/>
           </a:solidFill>
           <a:ln>
             <a:noFill/>
@@ -3920,14 +4052,14 @@
         </p:nvSpPr>
         <p:spPr>
           <a:xfrm>
-            <a:off x="-182880" y="6400800"/>
-            <a:ext cx="12557455" cy="502920"/>
-          </a:xfrm>
-          <a:prstGeom prst="wave">
+            <a:off x="5684367" y="1572768"/>
+            <a:ext cx="822960" cy="22860"/>
+          </a:xfrm>
+          <a:prstGeom prst="rect">
             <a:avLst/>
           </a:prstGeom>
           <a:solidFill>
-            <a:srgbClr val="26C5BD"/>
+            <a:srgbClr val="7BEAB3"/>
           </a:solidFill>
           <a:ln>
             <a:noFill/>
@@ -3943,19 +4075,19 @@
       </p:sp>
       <p:sp>
         <p:nvSpPr>
-          <p:cNvPr id="2" name="Title 1"/>
-          <p:cNvSpPr>
-            <a:spLocks noGrp="1"/>
-          </p:cNvSpPr>
-          <p:nvPr>
-            <p:ph type="title"/>
-          </p:nvPr>
-        </p:nvSpPr>
-        <p:spPr>
-          <a:xfrm>
-            <a:off x="640080" y="457200"/>
-            <a:ext cx="9722815" cy="868680"/>
-          </a:xfrm>
+          <p:cNvPr id="5" name="상단 라벨"/>
+          <p:cNvSpPr txBox="1"/>
+          <p:nvPr/>
+        </p:nvSpPr>
+        <p:spPr>
+          <a:xfrm>
+            <a:off x="640080" y="182880"/>
+            <a:ext cx="3657600" cy="274320"/>
+          </a:xfrm>
+          <a:prstGeom prst="rect">
+            <a:avLst/>
+          </a:prstGeom>
+          <a:noFill/>
         </p:spPr>
         <p:txBody>
           <a:bodyPr wrap="square" lIns="54864" rIns="54864" tIns="27432" bIns="27432" anchor="ctr">
@@ -3964,6 +4096,44 @@
           <a:lstStyle/>
           <a:p>
             <a:pPr algn="l">
+              <a:lnSpc>
+                <a:spcPct val="115000"/>
+              </a:lnSpc>
+            </a:pPr>
+            <a:r>
+              <a:rPr sz="800" b="1" i="0" spc="250">
+                <a:solidFill>
+                  <a:srgbClr val="8E8780"/>
+                </a:solidFill>
+              </a:rPr>
+              <a:t>FAMILY ALBUM</a:t>
+            </a:r>
+          </a:p>
+        </p:txBody>
+      </p:sp>
+      <p:sp>
+        <p:nvSpPr>
+          <p:cNvPr id="2" name="Title 1"/>
+          <p:cNvSpPr>
+            <a:spLocks noGrp="1"/>
+          </p:cNvSpPr>
+          <p:nvPr>
+            <p:ph type="title"/>
+          </p:nvPr>
+        </p:nvSpPr>
+        <p:spPr>
+          <a:xfrm>
+            <a:off x="1371600" y="640080"/>
+            <a:ext cx="9448495" cy="868680"/>
+          </a:xfrm>
+        </p:spPr>
+        <p:txBody>
+          <a:bodyPr wrap="square" lIns="54864" rIns="54864" tIns="27432" bIns="27432" anchor="ctr">
+            <a:noAutofit/>
+          </a:bodyPr>
+          <a:lstStyle/>
+          <a:p>
+            <a:pPr algn="ctr">
               <a:lnSpc>
                 <a:spcPct val="105000"/>
               </a:lnSpc>
@@ -3971,7 +4141,7 @@
             <a:r>
               <a:rPr sz="3000" b="1" i="0">
                 <a:solidFill>
-                  <a:srgbClr val="115F5B"/>
+                  <a:srgbClr val="26231F"/>
                 </a:solidFill>
               </a:rPr>
               <a:t>우리 가족 이야기</a:t>
@@ -3981,20 +4151,20 @@
       </p:sp>
       <p:sp>
         <p:nvSpPr>
-          <p:cNvPr id="5" name="타임라인 선"/>
+          <p:cNvPr id="6" name="타임라인 선"/>
           <p:cNvSpPr/>
           <p:nvPr/>
         </p:nvSpPr>
         <p:spPr>
           <a:xfrm>
-            <a:off x="640080" y="3291840"/>
+            <a:off x="640080" y="3520440"/>
             <a:ext cx="10911535" cy="54864"/>
           </a:xfrm>
           <a:prstGeom prst="rect">
             <a:avLst/>
           </a:prstGeom>
           <a:solidFill>
-            <a:srgbClr val="D1FAF8"/>
+            <a:srgbClr val="D1FAE6"/>
           </a:solidFill>
           <a:ln>
             <a:noFill/>
@@ -4010,20 +4180,20 @@
       </p:sp>
       <p:sp>
         <p:nvSpPr>
-          <p:cNvPr id="6" name="때 1"/>
+          <p:cNvPr id="7" name="때 1"/>
           <p:cNvSpPr/>
           <p:nvPr/>
         </p:nvSpPr>
         <p:spPr>
           <a:xfrm>
-            <a:off x="1802853" y="3108960"/>
+            <a:off x="1802853" y="3337560"/>
             <a:ext cx="402336" cy="402336"/>
           </a:xfrm>
           <a:prstGeom prst="ellipse">
             <a:avLst/>
           </a:prstGeom>
           <a:solidFill>
-            <a:srgbClr val="26C5BD"/>
+            <a:srgbClr val="7BEAB3"/>
           </a:solidFill>
           <a:ln w="38100">
             <a:solidFill>
@@ -4041,13 +4211,13 @@
       </p:sp>
       <p:sp>
         <p:nvSpPr>
-          <p:cNvPr id="7" name="TextBox 6"/>
+          <p:cNvPr id="8" name="TextBox 7"/>
           <p:cNvSpPr txBox="1"/>
           <p:nvPr/>
         </p:nvSpPr>
         <p:spPr>
           <a:xfrm>
-            <a:off x="685800" y="2468880"/>
+            <a:off x="685800" y="2697480"/>
             <a:ext cx="2636443" cy="457200"/>
           </a:xfrm>
           <a:prstGeom prst="rect">
@@ -4069,7 +4239,7 @@
             <a:r>
               <a:rPr sz="1600" b="1" i="0">
                 <a:solidFill>
-                  <a:srgbClr val="26C5BD"/>
+                  <a:srgbClr val="7BEAB3"/>
                 </a:solidFill>
               </a:rPr>
               <a:t>처음 만난 날</a:t>
@@ -4079,13 +4249,13 @@
       </p:sp>
       <p:sp>
         <p:nvSpPr>
-          <p:cNvPr id="8" name="TextBox 7"/>
+          <p:cNvPr id="9" name="TextBox 8"/>
           <p:cNvSpPr txBox="1"/>
           <p:nvPr/>
         </p:nvSpPr>
         <p:spPr>
           <a:xfrm>
-            <a:off x="731519" y="3657600"/>
+            <a:off x="731519" y="3886200"/>
             <a:ext cx="2545003" cy="457200"/>
           </a:xfrm>
           <a:prstGeom prst="rect">
@@ -4107,7 +4277,7 @@
             <a:r>
               <a:rPr sz="1800" b="1" i="0">
                 <a:solidFill>
-                  <a:srgbClr val="115F5B"/>
+                  <a:srgbClr val="274938"/>
                 </a:solidFill>
               </a:rPr>
               <a:t>첫 만남</a:t>
@@ -4117,13 +4287,13 @@
       </p:sp>
       <p:sp>
         <p:nvSpPr>
-          <p:cNvPr id="9" name="TextBox 8"/>
+          <p:cNvPr id="10" name="TextBox 9"/>
           <p:cNvSpPr txBox="1"/>
           <p:nvPr/>
         </p:nvSpPr>
         <p:spPr>
           <a:xfrm>
-            <a:off x="731519" y="4160520"/>
+            <a:off x="731519" y="4389120"/>
             <a:ext cx="2545003" cy="1645920"/>
           </a:xfrm>
           <a:prstGeom prst="rect">
@@ -4145,7 +4315,7 @@
             <a:r>
               <a:rPr sz="1500" b="0" i="0">
                 <a:solidFill>
-                  <a:srgbClr val="2B2B2B"/>
+                  <a:srgbClr val="26231F"/>
                 </a:solidFill>
               </a:rPr>
               <a:t>어디에서 어떻게 만났나요?</a:t>
@@ -4155,20 +4325,20 @@
       </p:sp>
       <p:sp>
         <p:nvSpPr>
-          <p:cNvPr id="10" name="때 2"/>
+          <p:cNvPr id="11" name="때 2"/>
           <p:cNvSpPr/>
           <p:nvPr/>
         </p:nvSpPr>
         <p:spPr>
           <a:xfrm>
-            <a:off x="4530737" y="3108960"/>
+            <a:off x="4530737" y="3337560"/>
             <a:ext cx="402336" cy="402336"/>
           </a:xfrm>
           <a:prstGeom prst="ellipse">
             <a:avLst/>
           </a:prstGeom>
           <a:solidFill>
-            <a:srgbClr val="26C5BD"/>
+            <a:srgbClr val="7BEAB3"/>
           </a:solidFill>
           <a:ln w="38100">
             <a:solidFill>
@@ -4186,13 +4356,13 @@
       </p:sp>
       <p:sp>
         <p:nvSpPr>
-          <p:cNvPr id="11" name="TextBox 10"/>
+          <p:cNvPr id="12" name="TextBox 11"/>
           <p:cNvSpPr txBox="1"/>
           <p:nvPr/>
         </p:nvSpPr>
         <p:spPr>
           <a:xfrm>
-            <a:off x="3413683" y="2468880"/>
+            <a:off x="3413683" y="2697480"/>
             <a:ext cx="2636443" cy="457200"/>
           </a:xfrm>
           <a:prstGeom prst="rect">
@@ -4214,7 +4384,7 @@
             <a:r>
               <a:rPr sz="1600" b="1" i="0">
                 <a:solidFill>
-                  <a:srgbClr val="26C5BD"/>
+                  <a:srgbClr val="7BEAB3"/>
                 </a:solidFill>
               </a:rPr>
               <a:t>결혼</a:t>
@@ -4224,13 +4394,13 @@
       </p:sp>
       <p:sp>
         <p:nvSpPr>
-          <p:cNvPr id="12" name="TextBox 11"/>
+          <p:cNvPr id="13" name="TextBox 12"/>
           <p:cNvSpPr txBox="1"/>
           <p:nvPr/>
         </p:nvSpPr>
         <p:spPr>
           <a:xfrm>
-            <a:off x="3459403" y="3657600"/>
+            <a:off x="3459403" y="3886200"/>
             <a:ext cx="2545003" cy="457200"/>
           </a:xfrm>
           <a:prstGeom prst="rect">
@@ -4252,7 +4422,7 @@
             <a:r>
               <a:rPr sz="1800" b="1" i="0">
                 <a:solidFill>
-                  <a:srgbClr val="115F5B"/>
+                  <a:srgbClr val="274938"/>
                 </a:solidFill>
               </a:rPr>
               <a:t>함께 시작한 날</a:t>
@@ -4262,13 +4432,13 @@
       </p:sp>
       <p:sp>
         <p:nvSpPr>
-          <p:cNvPr id="13" name="TextBox 12"/>
+          <p:cNvPr id="14" name="TextBox 13"/>
           <p:cNvSpPr txBox="1"/>
           <p:nvPr/>
         </p:nvSpPr>
         <p:spPr>
           <a:xfrm>
-            <a:off x="3459403" y="4160520"/>
+            <a:off x="3459403" y="4389120"/>
             <a:ext cx="2545003" cy="1645920"/>
           </a:xfrm>
           <a:prstGeom prst="rect">
@@ -4290,7 +4460,7 @@
             <a:r>
               <a:rPr sz="1500" b="0" i="0">
                 <a:solidFill>
-                  <a:srgbClr val="2B2B2B"/>
+                  <a:srgbClr val="26231F"/>
                 </a:solidFill>
               </a:rPr>
               <a:t>그날의 기억을 적어요</a:t>
@@ -4300,20 +4470,20 @@
       </p:sp>
       <p:sp>
         <p:nvSpPr>
-          <p:cNvPr id="14" name="때 3"/>
+          <p:cNvPr id="15" name="때 3"/>
           <p:cNvSpPr/>
           <p:nvPr/>
         </p:nvSpPr>
         <p:spPr>
           <a:xfrm>
-            <a:off x="7258621" y="3108960"/>
+            <a:off x="7258621" y="3337560"/>
             <a:ext cx="402336" cy="402336"/>
           </a:xfrm>
           <a:prstGeom prst="ellipse">
             <a:avLst/>
           </a:prstGeom>
           <a:solidFill>
-            <a:srgbClr val="26C5BD"/>
+            <a:srgbClr val="7BEAB3"/>
           </a:solidFill>
           <a:ln w="38100">
             <a:solidFill>
@@ -4331,13 +4501,13 @@
       </p:sp>
       <p:sp>
         <p:nvSpPr>
-          <p:cNvPr id="15" name="TextBox 14"/>
+          <p:cNvPr id="16" name="TextBox 15"/>
           <p:cNvSpPr txBox="1"/>
           <p:nvPr/>
         </p:nvSpPr>
         <p:spPr>
           <a:xfrm>
-            <a:off x="6141567" y="2468880"/>
+            <a:off x="6141567" y="2697480"/>
             <a:ext cx="2636443" cy="457200"/>
           </a:xfrm>
           <a:prstGeom prst="rect">
@@ -4359,7 +4529,7 @@
             <a:r>
               <a:rPr sz="1600" b="1" i="0">
                 <a:solidFill>
-                  <a:srgbClr val="26C5BD"/>
+                  <a:srgbClr val="7BEAB3"/>
                 </a:solidFill>
               </a:rPr>
               <a:t>첫 집</a:t>
@@ -4369,13 +4539,13 @@
       </p:sp>
       <p:sp>
         <p:nvSpPr>
-          <p:cNvPr id="16" name="TextBox 15"/>
+          <p:cNvPr id="17" name="TextBox 16"/>
           <p:cNvSpPr txBox="1"/>
           <p:nvPr/>
         </p:nvSpPr>
         <p:spPr>
           <a:xfrm>
-            <a:off x="6187287" y="3657600"/>
+            <a:off x="6187287" y="3886200"/>
             <a:ext cx="2545003" cy="457200"/>
           </a:xfrm>
           <a:prstGeom prst="rect">
@@ -4397,7 +4567,7 @@
             <a:r>
               <a:rPr sz="1800" b="1" i="0">
                 <a:solidFill>
-                  <a:srgbClr val="115F5B"/>
+                  <a:srgbClr val="274938"/>
                 </a:solidFill>
               </a:rPr>
               <a:t>우리의 보금자리</a:t>
@@ -4407,13 +4577,13 @@
       </p:sp>
       <p:sp>
         <p:nvSpPr>
-          <p:cNvPr id="17" name="TextBox 16"/>
+          <p:cNvPr id="18" name="TextBox 17"/>
           <p:cNvSpPr txBox="1"/>
           <p:nvPr/>
         </p:nvSpPr>
         <p:spPr>
           <a:xfrm>
-            <a:off x="6187287" y="4160520"/>
+            <a:off x="6187287" y="4389120"/>
             <a:ext cx="2545003" cy="1645920"/>
           </a:xfrm>
           <a:prstGeom prst="rect">
@@ -4435,7 +4605,7 @@
             <a:r>
               <a:rPr sz="1500" b="0" i="0">
                 <a:solidFill>
-                  <a:srgbClr val="2B2B2B"/>
+                  <a:srgbClr val="26231F"/>
                 </a:solidFill>
               </a:rPr>
               <a:t>처음 이사한 날</a:t>
@@ -4445,20 +4615,20 @@
       </p:sp>
       <p:sp>
         <p:nvSpPr>
-          <p:cNvPr id="18" name="때 4"/>
+          <p:cNvPr id="19" name="때 4"/>
           <p:cNvSpPr/>
           <p:nvPr/>
         </p:nvSpPr>
         <p:spPr>
           <a:xfrm>
-            <a:off x="9986505" y="3108960"/>
+            <a:off x="9986505" y="3337560"/>
             <a:ext cx="402336" cy="402336"/>
           </a:xfrm>
           <a:prstGeom prst="ellipse">
             <a:avLst/>
           </a:prstGeom>
           <a:solidFill>
-            <a:srgbClr val="26C5BD"/>
+            <a:srgbClr val="7BEAB3"/>
           </a:solidFill>
           <a:ln w="38100">
             <a:solidFill>
@@ -4476,13 +4646,13 @@
       </p:sp>
       <p:sp>
         <p:nvSpPr>
-          <p:cNvPr id="19" name="TextBox 18"/>
+          <p:cNvPr id="20" name="TextBox 19"/>
           <p:cNvSpPr txBox="1"/>
           <p:nvPr/>
         </p:nvSpPr>
         <p:spPr>
           <a:xfrm>
-            <a:off x="8869451" y="2468880"/>
+            <a:off x="8869451" y="2697480"/>
             <a:ext cx="2636443" cy="457200"/>
           </a:xfrm>
           <a:prstGeom prst="rect">
@@ -4504,7 +4674,7 @@
             <a:r>
               <a:rPr sz="1600" b="1" i="0">
                 <a:solidFill>
-                  <a:srgbClr val="26C5BD"/>
+                  <a:srgbClr val="7BEAB3"/>
                 </a:solidFill>
               </a:rPr>
               <a:t>지금</a:t>
@@ -4514,13 +4684,13 @@
       </p:sp>
       <p:sp>
         <p:nvSpPr>
-          <p:cNvPr id="20" name="TextBox 19"/>
+          <p:cNvPr id="21" name="TextBox 20"/>
           <p:cNvSpPr txBox="1"/>
           <p:nvPr/>
         </p:nvSpPr>
         <p:spPr>
           <a:xfrm>
-            <a:off x="8915171" y="3657600"/>
+            <a:off x="8915171" y="3886200"/>
             <a:ext cx="2545003" cy="457200"/>
           </a:xfrm>
           <a:prstGeom prst="rect">
@@ -4542,7 +4712,7 @@
             <a:r>
               <a:rPr sz="1800" b="1" i="0">
                 <a:solidFill>
-                  <a:srgbClr val="115F5B"/>
+                  <a:srgbClr val="274938"/>
                 </a:solidFill>
               </a:rPr>
               <a:t>오늘의 우리</a:t>
@@ -4552,13 +4722,13 @@
       </p:sp>
       <p:sp>
         <p:nvSpPr>
-          <p:cNvPr id="21" name="TextBox 20"/>
+          <p:cNvPr id="22" name="TextBox 21"/>
           <p:cNvSpPr txBox="1"/>
           <p:nvPr/>
         </p:nvSpPr>
         <p:spPr>
           <a:xfrm>
-            <a:off x="8915171" y="4160520"/>
+            <a:off x="8915171" y="4389120"/>
             <a:ext cx="2545003" cy="1645920"/>
           </a:xfrm>
           <a:prstGeom prst="rect">
@@ -4580,7 +4750,7 @@
             <a:r>
               <a:rPr sz="1500" b="0" i="0">
                 <a:solidFill>
-                  <a:srgbClr val="2B2B2B"/>
+                  <a:srgbClr val="26231F"/>
                 </a:solidFill>
               </a:rPr>
               <a:t>요즘 우리 이야기</a:t>
@@ -4602,7 +4772,7 @@
     <p:bg>
       <p:bgPr>
         <a:solidFill>
-          <a:srgbClr val="FFFFFF"/>
+          <a:srgbClr val="EAFDF4"/>
         </a:solidFill>
         <a:effectLst/>
       </p:bgPr>
@@ -4616,20 +4786,20 @@
       <p:grpSpPr/>
       <p:sp>
         <p:nvSpPr>
-          <p:cNvPr id="3" name="장식"/>
+          <p:cNvPr id="3" name="포인트"/>
           <p:cNvSpPr/>
           <p:nvPr/>
         </p:nvSpPr>
         <p:spPr>
           <a:xfrm>
-            <a:off x="-182880" y="6144768"/>
-            <a:ext cx="12557455" cy="731520"/>
-          </a:xfrm>
-          <a:prstGeom prst="wave">
+            <a:off x="5958687" y="246888"/>
+            <a:ext cx="274320" cy="274320"/>
+          </a:xfrm>
+          <a:prstGeom prst="mathPlus">
             <a:avLst/>
           </a:prstGeom>
           <a:solidFill>
-            <a:srgbClr val="D1FAF8"/>
+            <a:srgbClr val="7BEAB3"/>
           </a:solidFill>
           <a:ln>
             <a:noFill/>
@@ -4651,14 +4821,14 @@
         </p:nvSpPr>
         <p:spPr>
           <a:xfrm>
-            <a:off x="-182880" y="6400800"/>
-            <a:ext cx="12557455" cy="502920"/>
-          </a:xfrm>
-          <a:prstGeom prst="wave">
+            <a:off x="5684367" y="1572768"/>
+            <a:ext cx="822960" cy="22860"/>
+          </a:xfrm>
+          <a:prstGeom prst="rect">
             <a:avLst/>
           </a:prstGeom>
           <a:solidFill>
-            <a:srgbClr val="26C5BD"/>
+            <a:srgbClr val="7BEAB3"/>
           </a:solidFill>
           <a:ln>
             <a:noFill/>
@@ -4674,128 +4844,14 @@
       </p:sp>
       <p:sp>
         <p:nvSpPr>
-          <p:cNvPr id="2" name="Title 1"/>
-          <p:cNvSpPr>
-            <a:spLocks noGrp="1"/>
-          </p:cNvSpPr>
-          <p:nvPr>
-            <p:ph type="title"/>
-          </p:nvPr>
-        </p:nvSpPr>
-        <p:spPr>
-          <a:xfrm>
-            <a:off x="640080" y="457200"/>
-            <a:ext cx="9722815" cy="868680"/>
-          </a:xfrm>
-        </p:spPr>
-        <p:txBody>
-          <a:bodyPr wrap="square" lIns="54864" rIns="54864" tIns="27432" bIns="27432" anchor="ctr">
-            <a:noAutofit/>
-          </a:bodyPr>
-          <a:lstStyle/>
-          <a:p>
-            <a:pPr algn="l">
-              <a:lnSpc>
-                <a:spcPct val="105000"/>
-              </a:lnSpc>
-            </a:pPr>
-            <a:r>
-              <a:rPr sz="3000" b="1" i="0">
-                <a:solidFill>
-                  <a:srgbClr val="115F5B"/>
-                </a:solidFill>
-              </a:rPr>
-              <a:t>우리 가족의 약속</a:t>
-            </a:r>
-          </a:p>
-        </p:txBody>
-      </p:sp>
-      <p:sp>
-        <p:nvSpPr>
-          <p:cNvPr id="5" name="줄 1"/>
-          <p:cNvSpPr/>
-          <p:nvPr/>
-        </p:nvSpPr>
-        <p:spPr>
-          <a:xfrm>
-            <a:off x="640080" y="1554480"/>
-            <a:ext cx="10911535" cy="1005840"/>
-          </a:xfrm>
-          <a:prstGeom prst="roundRect">
-            <a:avLst>
-              <a:gd name="adj" fmla="val 8000"/>
-            </a:avLst>
-          </a:prstGeom>
-          <a:solidFill>
-            <a:srgbClr val="EEFCFB"/>
-          </a:solidFill>
-          <a:ln w="12700">
-            <a:solidFill>
-              <a:srgbClr val="D1FAF8"/>
-            </a:solidFill>
-          </a:ln>
-        </p:spPr>
-        <p:txBody>
-          <a:bodyPr rtlCol="0" anchor="ctr"/>
-          <a:lstStyle/>
-          <a:p>
-            <a:pPr algn="ctr"/>
-          </a:p>
-        </p:txBody>
-      </p:sp>
-      <p:sp>
-        <p:nvSpPr>
-          <p:cNvPr id="6" name="번호 1"/>
-          <p:cNvSpPr/>
-          <p:nvPr/>
-        </p:nvSpPr>
-        <p:spPr>
-          <a:xfrm>
-            <a:off x="822959" y="1828800"/>
-            <a:ext cx="457200" cy="457200"/>
-          </a:xfrm>
-          <a:prstGeom prst="ellipse">
-            <a:avLst/>
-          </a:prstGeom>
-          <a:solidFill>
-            <a:srgbClr val="26C5BD"/>
-          </a:solidFill>
-          <a:ln>
-            <a:noFill/>
-          </a:ln>
-        </p:spPr>
-        <p:txBody>
-          <a:bodyPr rtlCol="0" anchor="ctr" wrap="square" lIns="54864" rIns="54864" tIns="27432" bIns="27432">
-            <a:noAutofit/>
-          </a:bodyPr>
-          <a:lstStyle/>
-          <a:p>
-            <a:pPr algn="ctr">
-              <a:lnSpc>
-                <a:spcPct val="100000"/>
-              </a:lnSpc>
-            </a:pPr>
-            <a:r>
-              <a:rPr sz="1600" b="1" i="0">
-                <a:solidFill>
-                  <a:srgbClr val="FFFFFF"/>
-                </a:solidFill>
-              </a:rPr>
-              <a:t>1</a:t>
-            </a:r>
-          </a:p>
-        </p:txBody>
-      </p:sp>
-      <p:sp>
-        <p:nvSpPr>
-          <p:cNvPr id="7" name="TextBox 6"/>
+          <p:cNvPr id="5" name="상단 라벨"/>
           <p:cNvSpPr txBox="1"/>
           <p:nvPr/>
         </p:nvSpPr>
         <p:spPr>
           <a:xfrm>
-            <a:off x="1508760" y="1600200"/>
-            <a:ext cx="2743200" cy="914400"/>
+            <a:off x="640080" y="182880"/>
+            <a:ext cx="3657600" cy="274320"/>
           </a:xfrm>
           <a:prstGeom prst="rect">
             <a:avLst/>
@@ -4814,26 +4870,95 @@
               </a:lnSpc>
             </a:pPr>
             <a:r>
-              <a:rPr sz="1800" b="1" i="0">
-                <a:solidFill>
-                  <a:srgbClr val="115F5B"/>
+              <a:rPr sz="800" b="1" i="0" spc="250">
+                <a:solidFill>
+                  <a:srgbClr val="8E8780"/>
                 </a:solidFill>
               </a:rPr>
-              <a:t>약속 1</a:t>
-            </a:r>
-          </a:p>
-        </p:txBody>
-      </p:sp>
-      <p:sp>
-        <p:nvSpPr>
-          <p:cNvPr id="8" name="TextBox 7"/>
+              <a:t>FAMILY ALBUM</a:t>
+            </a:r>
+          </a:p>
+        </p:txBody>
+      </p:sp>
+      <p:sp>
+        <p:nvSpPr>
+          <p:cNvPr id="2" name="Title 1"/>
+          <p:cNvSpPr>
+            <a:spLocks noGrp="1"/>
+          </p:cNvSpPr>
+          <p:nvPr>
+            <p:ph type="title"/>
+          </p:nvPr>
+        </p:nvSpPr>
+        <p:spPr>
+          <a:xfrm>
+            <a:off x="1371600" y="640080"/>
+            <a:ext cx="9448495" cy="868680"/>
+          </a:xfrm>
+        </p:spPr>
+        <p:txBody>
+          <a:bodyPr wrap="square" lIns="54864" rIns="54864" tIns="27432" bIns="27432" anchor="ctr">
+            <a:noAutofit/>
+          </a:bodyPr>
+          <a:lstStyle/>
+          <a:p>
+            <a:pPr algn="ctr">
+              <a:lnSpc>
+                <a:spcPct val="105000"/>
+              </a:lnSpc>
+            </a:pPr>
+            <a:r>
+              <a:rPr sz="3000" b="1" i="0">
+                <a:solidFill>
+                  <a:srgbClr val="26231F"/>
+                </a:solidFill>
+              </a:rPr>
+              <a:t>우리 가족의 약속</a:t>
+            </a:r>
+          </a:p>
+        </p:txBody>
+      </p:sp>
+      <p:sp>
+        <p:nvSpPr>
+          <p:cNvPr id="6" name="줄 1"/>
+          <p:cNvSpPr/>
+          <p:nvPr/>
+        </p:nvSpPr>
+        <p:spPr>
+          <a:xfrm>
+            <a:off x="640080" y="1783080"/>
+            <a:ext cx="10911535" cy="1005840"/>
+          </a:xfrm>
+          <a:prstGeom prst="roundRect">
+            <a:avLst>
+              <a:gd name="adj" fmla="val 7000"/>
+            </a:avLst>
+          </a:prstGeom>
+          <a:noFill/>
+          <a:ln w="15875">
+            <a:solidFill>
+              <a:srgbClr val="7BEAB3"/>
+            </a:solidFill>
+          </a:ln>
+        </p:spPr>
+        <p:txBody>
+          <a:bodyPr rtlCol="0" anchor="ctr"/>
+          <a:lstStyle/>
+          <a:p>
+            <a:pPr algn="ctr"/>
+          </a:p>
+        </p:txBody>
+      </p:sp>
+      <p:sp>
+        <p:nvSpPr>
+          <p:cNvPr id="7" name="번호 1"/>
           <p:cNvSpPr txBox="1"/>
           <p:nvPr/>
         </p:nvSpPr>
         <p:spPr>
           <a:xfrm>
-            <a:off x="4297680" y="1600200"/>
-            <a:ext cx="7071055" cy="914400"/>
+            <a:off x="731519" y="2011680"/>
+            <a:ext cx="914400" cy="548640"/>
           </a:xfrm>
           <a:prstGeom prst="rect">
             <a:avLst/>
@@ -4852,101 +4977,25 @@
               </a:lnSpc>
             </a:pPr>
             <a:r>
-              <a:rPr sz="1700" b="0" i="0">
-                <a:solidFill>
-                  <a:srgbClr val="2B2B2B"/>
+              <a:rPr sz="2400" b="1" i="0">
+                <a:solidFill>
+                  <a:srgbClr val="7BEAB3"/>
                 </a:solidFill>
               </a:rPr>
-              <a:t>하루에 한 번 서로 안아 주기</a:t>
-            </a:r>
-          </a:p>
-        </p:txBody>
-      </p:sp>
-      <p:sp>
-        <p:nvSpPr>
-          <p:cNvPr id="9" name="줄 2"/>
-          <p:cNvSpPr/>
-          <p:nvPr/>
-        </p:nvSpPr>
-        <p:spPr>
-          <a:xfrm>
-            <a:off x="640080" y="2697480"/>
-            <a:ext cx="10911535" cy="1005840"/>
-          </a:xfrm>
-          <a:prstGeom prst="roundRect">
-            <a:avLst>
-              <a:gd name="adj" fmla="val 8000"/>
-            </a:avLst>
-          </a:prstGeom>
-          <a:solidFill>
-            <a:srgbClr val="EEFCFB"/>
-          </a:solidFill>
-          <a:ln w="12700">
-            <a:solidFill>
-              <a:srgbClr val="D1FAF8"/>
-            </a:solidFill>
-          </a:ln>
-        </p:spPr>
-        <p:txBody>
-          <a:bodyPr rtlCol="0" anchor="ctr"/>
-          <a:lstStyle/>
-          <a:p>
-            <a:pPr algn="ctr"/>
-          </a:p>
-        </p:txBody>
-      </p:sp>
-      <p:sp>
-        <p:nvSpPr>
-          <p:cNvPr id="10" name="번호 2"/>
-          <p:cNvSpPr/>
-          <p:nvPr/>
-        </p:nvSpPr>
-        <p:spPr>
-          <a:xfrm>
-            <a:off x="822959" y="2971800"/>
-            <a:ext cx="457200" cy="457200"/>
-          </a:xfrm>
-          <a:prstGeom prst="ellipse">
-            <a:avLst/>
-          </a:prstGeom>
-          <a:solidFill>
-            <a:srgbClr val="26C5BD"/>
-          </a:solidFill>
-          <a:ln>
-            <a:noFill/>
-          </a:ln>
-        </p:spPr>
-        <p:txBody>
-          <a:bodyPr rtlCol="0" anchor="ctr" wrap="square" lIns="54864" rIns="54864" tIns="27432" bIns="27432">
-            <a:noAutofit/>
-          </a:bodyPr>
-          <a:lstStyle/>
-          <a:p>
-            <a:pPr algn="ctr">
-              <a:lnSpc>
-                <a:spcPct val="100000"/>
-              </a:lnSpc>
-            </a:pPr>
-            <a:r>
-              <a:rPr sz="1600" b="1" i="0">
-                <a:solidFill>
-                  <a:srgbClr val="FFFFFF"/>
-                </a:solidFill>
-              </a:rPr>
-              <a:t>2</a:t>
-            </a:r>
-          </a:p>
-        </p:txBody>
-      </p:sp>
-      <p:sp>
-        <p:nvSpPr>
-          <p:cNvPr id="11" name="TextBox 10"/>
+              <a:t>01</a:t>
+            </a:r>
+          </a:p>
+        </p:txBody>
+      </p:sp>
+      <p:sp>
+        <p:nvSpPr>
+          <p:cNvPr id="8" name="TextBox 7"/>
           <p:cNvSpPr txBox="1"/>
           <p:nvPr/>
         </p:nvSpPr>
         <p:spPr>
           <a:xfrm>
-            <a:off x="1508760" y="2743200"/>
+            <a:off x="1508760" y="1828800"/>
             <a:ext cx="2743200" cy="914400"/>
           </a:xfrm>
           <a:prstGeom prst="rect">
@@ -4968,23 +5017,23 @@
             <a:r>
               <a:rPr sz="1800" b="1" i="0">
                 <a:solidFill>
-                  <a:srgbClr val="115F5B"/>
+                  <a:srgbClr val="274938"/>
                 </a:solidFill>
               </a:rPr>
-              <a:t>약속 2</a:t>
-            </a:r>
-          </a:p>
-        </p:txBody>
-      </p:sp>
-      <p:sp>
-        <p:nvSpPr>
-          <p:cNvPr id="12" name="TextBox 11"/>
+              <a:t>약속 1</a:t>
+            </a:r>
+          </a:p>
+        </p:txBody>
+      </p:sp>
+      <p:sp>
+        <p:nvSpPr>
+          <p:cNvPr id="9" name="TextBox 8"/>
           <p:cNvSpPr txBox="1"/>
           <p:nvPr/>
         </p:nvSpPr>
         <p:spPr>
           <a:xfrm>
-            <a:off x="4297680" y="2743200"/>
+            <a:off x="4297680" y="1828800"/>
             <a:ext cx="7071055" cy="914400"/>
           </a:xfrm>
           <a:prstGeom prst="rect">
@@ -5006,36 +5055,34 @@
             <a:r>
               <a:rPr sz="1700" b="0" i="0">
                 <a:solidFill>
-                  <a:srgbClr val="2B2B2B"/>
+                  <a:srgbClr val="26231F"/>
                 </a:solidFill>
               </a:rPr>
-              <a:t>화가 나도 잠자리 전엔 풀기</a:t>
-            </a:r>
-          </a:p>
-        </p:txBody>
-      </p:sp>
-      <p:sp>
-        <p:nvSpPr>
-          <p:cNvPr id="13" name="줄 3"/>
+              <a:t>하루에 한 번 서로 안아 주기</a:t>
+            </a:r>
+          </a:p>
+        </p:txBody>
+      </p:sp>
+      <p:sp>
+        <p:nvSpPr>
+          <p:cNvPr id="10" name="줄 2"/>
           <p:cNvSpPr/>
           <p:nvPr/>
         </p:nvSpPr>
         <p:spPr>
           <a:xfrm>
-            <a:off x="640080" y="3840480"/>
+            <a:off x="640080" y="2926080"/>
             <a:ext cx="10911535" cy="1005840"/>
           </a:xfrm>
           <a:prstGeom prst="roundRect">
             <a:avLst>
-              <a:gd name="adj" fmla="val 8000"/>
+              <a:gd name="adj" fmla="val 7000"/>
             </a:avLst>
           </a:prstGeom>
-          <a:solidFill>
-            <a:srgbClr val="EEFCFB"/>
-          </a:solidFill>
-          <a:ln w="12700">
+          <a:noFill/>
+          <a:ln w="15875">
             <a:solidFill>
-              <a:srgbClr val="D1FAF8"/>
+              <a:srgbClr val="7BEAB3"/>
             </a:solidFill>
           </a:ln>
         </p:spPr>
@@ -5049,57 +5096,14 @@
       </p:sp>
       <p:sp>
         <p:nvSpPr>
-          <p:cNvPr id="14" name="번호 3"/>
-          <p:cNvSpPr/>
-          <p:nvPr/>
-        </p:nvSpPr>
-        <p:spPr>
-          <a:xfrm>
-            <a:off x="822959" y="4114800"/>
-            <a:ext cx="457200" cy="457200"/>
-          </a:xfrm>
-          <a:prstGeom prst="ellipse">
-            <a:avLst/>
-          </a:prstGeom>
-          <a:solidFill>
-            <a:srgbClr val="26C5BD"/>
-          </a:solidFill>
-          <a:ln>
-            <a:noFill/>
-          </a:ln>
-        </p:spPr>
-        <p:txBody>
-          <a:bodyPr rtlCol="0" anchor="ctr" wrap="square" lIns="54864" rIns="54864" tIns="27432" bIns="27432">
-            <a:noAutofit/>
-          </a:bodyPr>
-          <a:lstStyle/>
-          <a:p>
-            <a:pPr algn="ctr">
-              <a:lnSpc>
-                <a:spcPct val="100000"/>
-              </a:lnSpc>
-            </a:pPr>
-            <a:r>
-              <a:rPr sz="1600" b="1" i="0">
-                <a:solidFill>
-                  <a:srgbClr val="FFFFFF"/>
-                </a:solidFill>
-              </a:rPr>
-              <a:t>3</a:t>
-            </a:r>
-          </a:p>
-        </p:txBody>
-      </p:sp>
-      <p:sp>
-        <p:nvSpPr>
-          <p:cNvPr id="15" name="TextBox 14"/>
+          <p:cNvPr id="11" name="번호 2"/>
           <p:cNvSpPr txBox="1"/>
           <p:nvPr/>
         </p:nvSpPr>
         <p:spPr>
           <a:xfrm>
-            <a:off x="1508760" y="3886200"/>
-            <a:ext cx="2743200" cy="914400"/>
+            <a:off x="731519" y="3154680"/>
+            <a:ext cx="914400" cy="548640"/>
           </a:xfrm>
           <a:prstGeom prst="rect">
             <a:avLst/>
@@ -5118,26 +5122,26 @@
               </a:lnSpc>
             </a:pPr>
             <a:r>
-              <a:rPr sz="1800" b="1" i="0">
-                <a:solidFill>
-                  <a:srgbClr val="115F5B"/>
+              <a:rPr sz="2400" b="1" i="0">
+                <a:solidFill>
+                  <a:srgbClr val="7BEAB3"/>
                 </a:solidFill>
               </a:rPr>
-              <a:t>약속 3</a:t>
-            </a:r>
-          </a:p>
-        </p:txBody>
-      </p:sp>
-      <p:sp>
-        <p:nvSpPr>
-          <p:cNvPr id="16" name="TextBox 15"/>
+              <a:t>02</a:t>
+            </a:r>
+          </a:p>
+        </p:txBody>
+      </p:sp>
+      <p:sp>
+        <p:nvSpPr>
+          <p:cNvPr id="12" name="TextBox 11"/>
           <p:cNvSpPr txBox="1"/>
           <p:nvPr/>
         </p:nvSpPr>
         <p:spPr>
           <a:xfrm>
-            <a:off x="4297680" y="3886200"/>
-            <a:ext cx="7071055" cy="914400"/>
+            <a:off x="1508760" y="2971800"/>
+            <a:ext cx="2743200" cy="914400"/>
           </a:xfrm>
           <a:prstGeom prst="rect">
             <a:avLst/>
@@ -5156,9 +5160,192 @@
               </a:lnSpc>
             </a:pPr>
             <a:r>
+              <a:rPr sz="1800" b="1" i="0">
+                <a:solidFill>
+                  <a:srgbClr val="274938"/>
+                </a:solidFill>
+              </a:rPr>
+              <a:t>약속 2</a:t>
+            </a:r>
+          </a:p>
+        </p:txBody>
+      </p:sp>
+      <p:sp>
+        <p:nvSpPr>
+          <p:cNvPr id="13" name="TextBox 12"/>
+          <p:cNvSpPr txBox="1"/>
+          <p:nvPr/>
+        </p:nvSpPr>
+        <p:spPr>
+          <a:xfrm>
+            <a:off x="4297680" y="2971800"/>
+            <a:ext cx="7071055" cy="914400"/>
+          </a:xfrm>
+          <a:prstGeom prst="rect">
+            <a:avLst/>
+          </a:prstGeom>
+          <a:noFill/>
+        </p:spPr>
+        <p:txBody>
+          <a:bodyPr wrap="square" lIns="54864" rIns="54864" tIns="27432" bIns="27432" anchor="ctr">
+            <a:noAutofit/>
+          </a:bodyPr>
+          <a:lstStyle/>
+          <a:p>
+            <a:pPr algn="l">
+              <a:lnSpc>
+                <a:spcPct val="115000"/>
+              </a:lnSpc>
+            </a:pPr>
+            <a:r>
               <a:rPr sz="1700" b="0" i="0">
                 <a:solidFill>
-                  <a:srgbClr val="2B2B2B"/>
+                  <a:srgbClr val="26231F"/>
+                </a:solidFill>
+              </a:rPr>
+              <a:t>화가 나도 잠자리 전엔 풀기</a:t>
+            </a:r>
+          </a:p>
+        </p:txBody>
+      </p:sp>
+      <p:sp>
+        <p:nvSpPr>
+          <p:cNvPr id="14" name="줄 3"/>
+          <p:cNvSpPr/>
+          <p:nvPr/>
+        </p:nvSpPr>
+        <p:spPr>
+          <a:xfrm>
+            <a:off x="640080" y="4069080"/>
+            <a:ext cx="10911535" cy="1005840"/>
+          </a:xfrm>
+          <a:prstGeom prst="roundRect">
+            <a:avLst>
+              <a:gd name="adj" fmla="val 7000"/>
+            </a:avLst>
+          </a:prstGeom>
+          <a:noFill/>
+          <a:ln w="15875">
+            <a:solidFill>
+              <a:srgbClr val="7BEAB3"/>
+            </a:solidFill>
+          </a:ln>
+        </p:spPr>
+        <p:txBody>
+          <a:bodyPr rtlCol="0" anchor="ctr"/>
+          <a:lstStyle/>
+          <a:p>
+            <a:pPr algn="ctr"/>
+          </a:p>
+        </p:txBody>
+      </p:sp>
+      <p:sp>
+        <p:nvSpPr>
+          <p:cNvPr id="15" name="번호 3"/>
+          <p:cNvSpPr txBox="1"/>
+          <p:nvPr/>
+        </p:nvSpPr>
+        <p:spPr>
+          <a:xfrm>
+            <a:off x="731519" y="4297680"/>
+            <a:ext cx="914400" cy="548640"/>
+          </a:xfrm>
+          <a:prstGeom prst="rect">
+            <a:avLst/>
+          </a:prstGeom>
+          <a:noFill/>
+        </p:spPr>
+        <p:txBody>
+          <a:bodyPr wrap="square" lIns="54864" rIns="54864" tIns="27432" bIns="27432" anchor="ctr">
+            <a:noAutofit/>
+          </a:bodyPr>
+          <a:lstStyle/>
+          <a:p>
+            <a:pPr algn="l">
+              <a:lnSpc>
+                <a:spcPct val="115000"/>
+              </a:lnSpc>
+            </a:pPr>
+            <a:r>
+              <a:rPr sz="2400" b="1" i="0">
+                <a:solidFill>
+                  <a:srgbClr val="7BEAB3"/>
+                </a:solidFill>
+              </a:rPr>
+              <a:t>03</a:t>
+            </a:r>
+          </a:p>
+        </p:txBody>
+      </p:sp>
+      <p:sp>
+        <p:nvSpPr>
+          <p:cNvPr id="16" name="TextBox 15"/>
+          <p:cNvSpPr txBox="1"/>
+          <p:nvPr/>
+        </p:nvSpPr>
+        <p:spPr>
+          <a:xfrm>
+            <a:off x="1508760" y="4114800"/>
+            <a:ext cx="2743200" cy="914400"/>
+          </a:xfrm>
+          <a:prstGeom prst="rect">
+            <a:avLst/>
+          </a:prstGeom>
+          <a:noFill/>
+        </p:spPr>
+        <p:txBody>
+          <a:bodyPr wrap="square" lIns="54864" rIns="54864" tIns="27432" bIns="27432" anchor="ctr">
+            <a:noAutofit/>
+          </a:bodyPr>
+          <a:lstStyle/>
+          <a:p>
+            <a:pPr algn="l">
+              <a:lnSpc>
+                <a:spcPct val="115000"/>
+              </a:lnSpc>
+            </a:pPr>
+            <a:r>
+              <a:rPr sz="1800" b="1" i="0">
+                <a:solidFill>
+                  <a:srgbClr val="274938"/>
+                </a:solidFill>
+              </a:rPr>
+              <a:t>약속 3</a:t>
+            </a:r>
+          </a:p>
+        </p:txBody>
+      </p:sp>
+      <p:sp>
+        <p:nvSpPr>
+          <p:cNvPr id="17" name="TextBox 16"/>
+          <p:cNvSpPr txBox="1"/>
+          <p:nvPr/>
+        </p:nvSpPr>
+        <p:spPr>
+          <a:xfrm>
+            <a:off x="4297680" y="4114800"/>
+            <a:ext cx="7071055" cy="914400"/>
+          </a:xfrm>
+          <a:prstGeom prst="rect">
+            <a:avLst/>
+          </a:prstGeom>
+          <a:noFill/>
+        </p:spPr>
+        <p:txBody>
+          <a:bodyPr wrap="square" lIns="54864" rIns="54864" tIns="27432" bIns="27432" anchor="ctr">
+            <a:noAutofit/>
+          </a:bodyPr>
+          <a:lstStyle/>
+          <a:p>
+            <a:pPr algn="l">
+              <a:lnSpc>
+                <a:spcPct val="115000"/>
+              </a:lnSpc>
+            </a:pPr>
+            <a:r>
+              <a:rPr sz="1700" b="0" i="0">
+                <a:solidFill>
+                  <a:srgbClr val="26231F"/>
                 </a:solidFill>
               </a:rPr>
               <a:t>한 달에 한 번 데이트하기</a:t>
@@ -5180,7 +5367,7 @@
     <p:bg>
       <p:bgPr>
         <a:solidFill>
-          <a:srgbClr val="FFFFFF"/>
+          <a:srgbClr val="EAFDF4"/>
         </a:solidFill>
         <a:effectLst/>
       </p:bgPr>
@@ -5194,20 +5381,20 @@
       <p:grpSpPr/>
       <p:sp>
         <p:nvSpPr>
-          <p:cNvPr id="3" name="장식"/>
+          <p:cNvPr id="3" name="포인트"/>
           <p:cNvSpPr/>
           <p:nvPr/>
         </p:nvSpPr>
         <p:spPr>
           <a:xfrm>
-            <a:off x="-182880" y="6144768"/>
-            <a:ext cx="12557455" cy="731520"/>
-          </a:xfrm>
-          <a:prstGeom prst="wave">
+            <a:off x="5958687" y="246888"/>
+            <a:ext cx="274320" cy="274320"/>
+          </a:xfrm>
+          <a:prstGeom prst="mathPlus">
             <a:avLst/>
           </a:prstGeom>
           <a:solidFill>
-            <a:srgbClr val="D1FAF8"/>
+            <a:srgbClr val="7BEAB3"/>
           </a:solidFill>
           <a:ln>
             <a:noFill/>
@@ -5229,14 +5416,14 @@
         </p:nvSpPr>
         <p:spPr>
           <a:xfrm>
-            <a:off x="-182880" y="6400800"/>
-            <a:ext cx="12557455" cy="502920"/>
-          </a:xfrm>
-          <a:prstGeom prst="wave">
+            <a:off x="5684367" y="1572768"/>
+            <a:ext cx="822960" cy="22860"/>
+          </a:xfrm>
+          <a:prstGeom prst="rect">
             <a:avLst/>
           </a:prstGeom>
           <a:solidFill>
-            <a:srgbClr val="26C5BD"/>
+            <a:srgbClr val="7BEAB3"/>
           </a:solidFill>
           <a:ln>
             <a:noFill/>
@@ -5252,19 +5439,19 @@
       </p:sp>
       <p:sp>
         <p:nvSpPr>
-          <p:cNvPr id="2" name="Title 1"/>
-          <p:cNvSpPr>
-            <a:spLocks noGrp="1"/>
-          </p:cNvSpPr>
-          <p:nvPr>
-            <p:ph type="title"/>
-          </p:nvPr>
-        </p:nvSpPr>
-        <p:spPr>
-          <a:xfrm>
-            <a:off x="640080" y="457200"/>
-            <a:ext cx="9722815" cy="868680"/>
-          </a:xfrm>
+          <p:cNvPr id="5" name="상단 라벨"/>
+          <p:cNvSpPr txBox="1"/>
+          <p:nvPr/>
+        </p:nvSpPr>
+        <p:spPr>
+          <a:xfrm>
+            <a:off x="640080" y="182880"/>
+            <a:ext cx="3657600" cy="274320"/>
+          </a:xfrm>
+          <a:prstGeom prst="rect">
+            <a:avLst/>
+          </a:prstGeom>
+          <a:noFill/>
         </p:spPr>
         <p:txBody>
           <a:bodyPr wrap="square" lIns="54864" rIns="54864" tIns="27432" bIns="27432" anchor="ctr">
@@ -5273,6 +5460,44 @@
           <a:lstStyle/>
           <a:p>
             <a:pPr algn="l">
+              <a:lnSpc>
+                <a:spcPct val="115000"/>
+              </a:lnSpc>
+            </a:pPr>
+            <a:r>
+              <a:rPr sz="800" b="1" i="0" spc="250">
+                <a:solidFill>
+                  <a:srgbClr val="8E8780"/>
+                </a:solidFill>
+              </a:rPr>
+              <a:t>FAMILY ALBUM</a:t>
+            </a:r>
+          </a:p>
+        </p:txBody>
+      </p:sp>
+      <p:sp>
+        <p:nvSpPr>
+          <p:cNvPr id="2" name="Title 1"/>
+          <p:cNvSpPr>
+            <a:spLocks noGrp="1"/>
+          </p:cNvSpPr>
+          <p:nvPr>
+            <p:ph type="title"/>
+          </p:nvPr>
+        </p:nvSpPr>
+        <p:spPr>
+          <a:xfrm>
+            <a:off x="1371600" y="640080"/>
+            <a:ext cx="9448495" cy="868680"/>
+          </a:xfrm>
+        </p:spPr>
+        <p:txBody>
+          <a:bodyPr wrap="square" lIns="54864" rIns="54864" tIns="27432" bIns="27432" anchor="ctr">
+            <a:noAutofit/>
+          </a:bodyPr>
+          <a:lstStyle/>
+          <a:p>
+            <a:pPr algn="ctr">
               <a:lnSpc>
                 <a:spcPct val="105000"/>
               </a:lnSpc>
@@ -5280,7 +5505,7 @@
             <a:r>
               <a:rPr sz="3000" b="1" i="0">
                 <a:solidFill>
-                  <a:srgbClr val="115F5B"/>
+                  <a:srgbClr val="26231F"/>
                 </a:solidFill>
               </a:rPr>
               <a:t>가족 사진</a:t>
@@ -5290,14 +5515,14 @@
       </p:sp>
       <p:sp>
         <p:nvSpPr>
-          <p:cNvPr id="5" name="사진 자리"/>
+          <p:cNvPr id="6" name="사진 자리"/>
           <p:cNvSpPr/>
           <p:nvPr/>
         </p:nvSpPr>
         <p:spPr>
           <a:xfrm>
-            <a:off x="640080" y="1554480"/>
-            <a:ext cx="3515258" cy="2103120"/>
+            <a:off x="640080" y="1783080"/>
+            <a:ext cx="3515258" cy="2194560"/>
           </a:xfrm>
           <a:prstGeom prst="roundRect">
             <a:avLst>
@@ -5305,12 +5530,10 @@
             </a:avLst>
           </a:prstGeom>
           <a:solidFill>
-            <a:srgbClr val="D1FAF8"/>
+            <a:srgbClr val="D1FAE6"/>
           </a:solidFill>
           <a:ln w="19050">
-            <a:solidFill>
-              <a:srgbClr val="26C5BD"/>
-            </a:solidFill>
+            <a:noFill/>
             <a:prstDash val="dash"/>
           </a:ln>
         </p:spPr>
@@ -5328,7 +5551,7 @@
             <a:r>
               <a:rPr sz="1200" b="0" i="0">
                 <a:solidFill>
-                  <a:srgbClr val="115F5B"/>
+                  <a:srgbClr val="8E8780"/>
                 </a:solidFill>
               </a:rPr>
               <a:t>사진 1</a:t>
@@ -5338,14 +5561,14 @@
       </p:sp>
       <p:sp>
         <p:nvSpPr>
-          <p:cNvPr id="6" name="사진 자리"/>
+          <p:cNvPr id="7" name="사진 자리"/>
           <p:cNvSpPr/>
           <p:nvPr/>
         </p:nvSpPr>
         <p:spPr>
           <a:xfrm>
-            <a:off x="4338218" y="1554480"/>
-            <a:ext cx="3515258" cy="2103120"/>
+            <a:off x="4338218" y="1783080"/>
+            <a:ext cx="3515258" cy="2194560"/>
           </a:xfrm>
           <a:prstGeom prst="roundRect">
             <a:avLst>
@@ -5353,12 +5576,10 @@
             </a:avLst>
           </a:prstGeom>
           <a:solidFill>
-            <a:srgbClr val="D1FAF8"/>
+            <a:srgbClr val="D1FAE6"/>
           </a:solidFill>
           <a:ln w="19050">
-            <a:solidFill>
-              <a:srgbClr val="26C5BD"/>
-            </a:solidFill>
+            <a:noFill/>
             <a:prstDash val="dash"/>
           </a:ln>
         </p:spPr>
@@ -5376,7 +5597,7 @@
             <a:r>
               <a:rPr sz="1200" b="0" i="0">
                 <a:solidFill>
-                  <a:srgbClr val="115F5B"/>
+                  <a:srgbClr val="8E8780"/>
                 </a:solidFill>
               </a:rPr>
               <a:t>사진 2</a:t>
@@ -5386,14 +5607,14 @@
       </p:sp>
       <p:sp>
         <p:nvSpPr>
-          <p:cNvPr id="7" name="사진 자리"/>
+          <p:cNvPr id="8" name="사진 자리"/>
           <p:cNvSpPr/>
           <p:nvPr/>
         </p:nvSpPr>
         <p:spPr>
           <a:xfrm>
-            <a:off x="8036356" y="1554480"/>
-            <a:ext cx="3515258" cy="2103120"/>
+            <a:off x="8036356" y="1783080"/>
+            <a:ext cx="3515258" cy="2194560"/>
           </a:xfrm>
           <a:prstGeom prst="roundRect">
             <a:avLst>
@@ -5401,12 +5622,10 @@
             </a:avLst>
           </a:prstGeom>
           <a:solidFill>
-            <a:srgbClr val="D1FAF8"/>
+            <a:srgbClr val="D1FAE6"/>
           </a:solidFill>
           <a:ln w="19050">
-            <a:solidFill>
-              <a:srgbClr val="26C5BD"/>
-            </a:solidFill>
+            <a:noFill/>
             <a:prstDash val="dash"/>
           </a:ln>
         </p:spPr>
@@ -5424,7 +5643,7 @@
             <a:r>
               <a:rPr sz="1200" b="0" i="0">
                 <a:solidFill>
-                  <a:srgbClr val="115F5B"/>
+                  <a:srgbClr val="8E8780"/>
                 </a:solidFill>
               </a:rPr>
               <a:t>사진 3</a:t>
@@ -5434,14 +5653,14 @@
       </p:sp>
       <p:sp>
         <p:nvSpPr>
-          <p:cNvPr id="8" name="사진 자리"/>
+          <p:cNvPr id="9" name="사진 자리"/>
           <p:cNvSpPr/>
           <p:nvPr/>
         </p:nvSpPr>
         <p:spPr>
           <a:xfrm>
-            <a:off x="640080" y="3840480"/>
-            <a:ext cx="3515258" cy="2103120"/>
+            <a:off x="640080" y="4160520"/>
+            <a:ext cx="3515258" cy="2194560"/>
           </a:xfrm>
           <a:prstGeom prst="roundRect">
             <a:avLst>
@@ -5449,12 +5668,10 @@
             </a:avLst>
           </a:prstGeom>
           <a:solidFill>
-            <a:srgbClr val="D1FAF8"/>
+            <a:srgbClr val="D1FAE6"/>
           </a:solidFill>
           <a:ln w="19050">
-            <a:solidFill>
-              <a:srgbClr val="26C5BD"/>
-            </a:solidFill>
+            <a:noFill/>
             <a:prstDash val="dash"/>
           </a:ln>
         </p:spPr>
@@ -5472,7 +5689,7 @@
             <a:r>
               <a:rPr sz="1200" b="0" i="0">
                 <a:solidFill>
-                  <a:srgbClr val="115F5B"/>
+                  <a:srgbClr val="8E8780"/>
                 </a:solidFill>
               </a:rPr>
               <a:t>사진 4</a:t>
@@ -5482,14 +5699,14 @@
       </p:sp>
       <p:sp>
         <p:nvSpPr>
-          <p:cNvPr id="9" name="사진 자리"/>
+          <p:cNvPr id="10" name="사진 자리"/>
           <p:cNvSpPr/>
           <p:nvPr/>
         </p:nvSpPr>
         <p:spPr>
           <a:xfrm>
-            <a:off x="4338218" y="3840480"/>
-            <a:ext cx="3515258" cy="2103120"/>
+            <a:off x="4338218" y="4160520"/>
+            <a:ext cx="3515258" cy="2194560"/>
           </a:xfrm>
           <a:prstGeom prst="roundRect">
             <a:avLst>
@@ -5497,12 +5714,10 @@
             </a:avLst>
           </a:prstGeom>
           <a:solidFill>
-            <a:srgbClr val="D1FAF8"/>
+            <a:srgbClr val="D1FAE6"/>
           </a:solidFill>
           <a:ln w="19050">
-            <a:solidFill>
-              <a:srgbClr val="26C5BD"/>
-            </a:solidFill>
+            <a:noFill/>
             <a:prstDash val="dash"/>
           </a:ln>
         </p:spPr>
@@ -5520,7 +5735,7 @@
             <a:r>
               <a:rPr sz="1200" b="0" i="0">
                 <a:solidFill>
-                  <a:srgbClr val="115F5B"/>
+                  <a:srgbClr val="8E8780"/>
                 </a:solidFill>
               </a:rPr>
               <a:t>사진 5</a:t>
@@ -5530,14 +5745,14 @@
       </p:sp>
       <p:sp>
         <p:nvSpPr>
-          <p:cNvPr id="10" name="사진 자리"/>
+          <p:cNvPr id="11" name="사진 자리"/>
           <p:cNvSpPr/>
           <p:nvPr/>
         </p:nvSpPr>
         <p:spPr>
           <a:xfrm>
-            <a:off x="8036356" y="3840480"/>
-            <a:ext cx="3515258" cy="2103120"/>
+            <a:off x="8036356" y="4160520"/>
+            <a:ext cx="3515258" cy="2194560"/>
           </a:xfrm>
           <a:prstGeom prst="roundRect">
             <a:avLst>
@@ -5545,12 +5760,10 @@
             </a:avLst>
           </a:prstGeom>
           <a:solidFill>
-            <a:srgbClr val="D1FAF8"/>
+            <a:srgbClr val="D1FAE6"/>
           </a:solidFill>
           <a:ln w="19050">
-            <a:solidFill>
-              <a:srgbClr val="26C5BD"/>
-            </a:solidFill>
+            <a:noFill/>
             <a:prstDash val="dash"/>
           </a:ln>
         </p:spPr>
@@ -5568,7 +5781,7 @@
             <a:r>
               <a:rPr sz="1200" b="0" i="0">
                 <a:solidFill>
-                  <a:srgbClr val="115F5B"/>
+                  <a:srgbClr val="8E8780"/>
                 </a:solidFill>
               </a:rPr>
               <a:t>사진 6</a:t>
@@ -5587,6 +5800,14 @@
 <file path=ppt/slides/slide6.xml><?xml version="1.0" encoding="utf-8"?>
 <p:sld xmlns:a="http://schemas.openxmlformats.org/drawingml/2006/main" xmlns:p="http://schemas.openxmlformats.org/presentationml/2006/main" xmlns:r="http://schemas.openxmlformats.org/officeDocument/2006/relationships">
   <p:cSld>
+    <p:bg>
+      <p:bgPr>
+        <a:solidFill>
+          <a:srgbClr val="EAFDF4"/>
+        </a:solidFill>
+        <a:effectLst/>
+      </p:bgPr>
+    </p:bg>
     <p:spTree>
       <p:nvGrpSpPr>
         <p:cNvPr id="1" name=""/>
@@ -5594,30 +5815,120 @@
         <p:nvPr/>
       </p:nvGrpSpPr>
       <p:grpSpPr/>
-      <p:pic>
-        <p:nvPicPr>
-          <p:cNvPr id="3" name="표지 그림" descr="family-21.jpg"/>
-          <p:cNvPicPr>
-            <a:picLocks noChangeAspect="1"/>
-          </p:cNvPicPr>
+      <p:sp>
+        <p:nvSpPr>
+          <p:cNvPr id="3" name="사진 자리"/>
+          <p:cNvSpPr/>
           <p:nvPr/>
-        </p:nvPicPr>
-        <p:blipFill>
-          <a:blip r:embed="rId2"/>
-          <a:stretch>
-            <a:fillRect/>
-          </a:stretch>
-        </p:blipFill>
-        <p:spPr>
-          <a:xfrm>
-            <a:off x="0" y="0"/>
-            <a:ext cx="12191695" cy="6858000"/>
+        </p:nvSpPr>
+        <p:spPr>
+          <a:xfrm>
+            <a:off x="7071183" y="960120"/>
+            <a:ext cx="3657508" cy="4526280"/>
+          </a:xfrm>
+          <a:prstGeom prst="roundRect">
+            <a:avLst>
+              <a:gd name="adj" fmla="val 4000"/>
+            </a:avLst>
+          </a:prstGeom>
+          <a:solidFill>
+            <a:srgbClr val="A5F3CC"/>
+          </a:solidFill>
+          <a:ln>
+            <a:noFill/>
+          </a:ln>
+        </p:spPr>
+        <p:txBody>
+          <a:bodyPr rtlCol="0" anchor="ctr" wrap="square" lIns="54864" rIns="54864" tIns="27432" bIns="27432">
+            <a:noAutofit/>
+          </a:bodyPr>
+          <a:lstStyle/>
+          <a:p>
+            <a:pPr algn="ctr">
+              <a:lnSpc>
+                <a:spcPct val="100000"/>
+              </a:lnSpc>
+            </a:pPr>
+            <a:r>
+              <a:rPr sz="1400" b="0" i="0">
+                <a:solidFill>
+                  <a:srgbClr val="274938"/>
+                </a:solidFill>
+              </a:rPr>
+              <a:t>사진을 넣어 주세요</a:t>
+            </a:r>
+          </a:p>
+        </p:txBody>
+      </p:sp>
+      <p:sp>
+        <p:nvSpPr>
+          <p:cNvPr id="4" name="장식"/>
+          <p:cNvSpPr/>
+          <p:nvPr/>
+        </p:nvSpPr>
+        <p:spPr>
+          <a:xfrm>
+            <a:off x="7558851" y="1234439"/>
+            <a:ext cx="3657508" cy="4526280"/>
+          </a:xfrm>
+          <a:prstGeom prst="roundRect">
+            <a:avLst>
+              <a:gd name="adj" fmla="val 4000"/>
+            </a:avLst>
+          </a:prstGeom>
+          <a:noFill/>
+          <a:ln w="9525">
+            <a:solidFill>
+              <a:srgbClr val="26231F"/>
+            </a:solidFill>
+          </a:ln>
+        </p:spPr>
+        <p:txBody>
+          <a:bodyPr rtlCol="0" anchor="ctr"/>
+          <a:lstStyle/>
+          <a:p>
+            <a:pPr algn="ctr"/>
+          </a:p>
+        </p:txBody>
+      </p:sp>
+      <p:sp>
+        <p:nvSpPr>
+          <p:cNvPr id="5" name="라벨"/>
+          <p:cNvSpPr txBox="1"/>
+          <p:nvPr/>
+        </p:nvSpPr>
+        <p:spPr>
+          <a:xfrm>
+            <a:off x="822960" y="2148840"/>
+            <a:ext cx="5608179" cy="274320"/>
           </a:xfrm>
           <a:prstGeom prst="rect">
             <a:avLst/>
           </a:prstGeom>
-        </p:spPr>
-      </p:pic>
+          <a:noFill/>
+        </p:spPr>
+        <p:txBody>
+          <a:bodyPr wrap="square" lIns="54864" rIns="54864" tIns="27432" bIns="27432" anchor="t">
+            <a:noAutofit/>
+          </a:bodyPr>
+          <a:lstStyle/>
+          <a:p>
+            <a:pPr algn="l">
+              <a:lnSpc>
+                <a:spcPct val="115000"/>
+              </a:lnSpc>
+            </a:pPr>
+            <a:r>
+              <a:rPr sz="1000" b="1" i="0" spc="250">
+                <a:solidFill>
+                  <a:srgbClr val="26231F"/>
+                </a:solidFill>
+              </a:rPr>
+              <a:t>FAMILY ALBUM</a:t>
+            </a:r>
+          </a:p>
+        </p:txBody>
+      </p:sp>
       <p:sp>
         <p:nvSpPr>
           <p:cNvPr id="2" name="Title 1"/>
@@ -5630,8 +5941,8 @@
         </p:nvSpPr>
         <p:spPr>
           <a:xfrm>
-            <a:off x="853418" y="2057400"/>
-            <a:ext cx="6095847" cy="1554480"/>
+            <a:off x="822960" y="2606040"/>
+            <a:ext cx="5608179" cy="1188720"/>
           </a:xfrm>
         </p:spPr>
         <p:txBody>
@@ -5646,9 +5957,9 @@
               </a:lnSpc>
             </a:pPr>
             <a:r>
-              <a:rPr sz="3600" b="1" i="0">
-                <a:solidFill>
-                  <a:srgbClr val="115F5B"/>
+              <a:rPr sz="4000" b="1" i="0">
+                <a:solidFill>
+                  <a:srgbClr val="26231F"/>
                 </a:solidFill>
               </a:rPr>
               <a:t>우리 가족 소개를 마칩니다</a:t>
@@ -5658,14 +5969,14 @@
       </p:sp>
       <p:sp>
         <p:nvSpPr>
-          <p:cNvPr id="4" name="한 줄 문구"/>
+          <p:cNvPr id="6" name="한 줄 문구"/>
           <p:cNvSpPr txBox="1"/>
           <p:nvPr/>
         </p:nvSpPr>
         <p:spPr>
           <a:xfrm>
-            <a:off x="853418" y="3749039"/>
-            <a:ext cx="6095847" cy="822960"/>
+            <a:off x="822960" y="3886200"/>
+            <a:ext cx="5608179" cy="822960"/>
           </a:xfrm>
           <a:prstGeom prst="rect">
             <a:avLst/>
@@ -5684,9 +5995,9 @@
               </a:lnSpc>
             </a:pPr>
             <a:r>
-              <a:rPr sz="1700" b="0" i="1">
-                <a:solidFill>
-                  <a:srgbClr val="115F5B"/>
+              <a:rPr sz="1700" b="0" i="0">
+                <a:solidFill>
+                  <a:srgbClr val="26231F"/>
                 </a:solidFill>
               </a:rPr>
               <a:t>읽어 주셔서 고맙습니다</a:t>
@@ -5696,14 +6007,14 @@
       </p:sp>
       <p:sp>
         <p:nvSpPr>
-          <p:cNvPr id="5" name="안내 문구"/>
+          <p:cNvPr id="7" name="안내 문구"/>
           <p:cNvSpPr txBox="1"/>
           <p:nvPr/>
         </p:nvSpPr>
         <p:spPr>
           <a:xfrm>
-            <a:off x="853418" y="4617720"/>
-            <a:ext cx="6095847" cy="914400"/>
+            <a:off x="822960" y="4754880"/>
+            <a:ext cx="5608179" cy="914400"/>
           </a:xfrm>
           <a:prstGeom prst="rect">
             <a:avLst/>
@@ -5724,7 +6035,7 @@
             <a:r>
               <a:rPr sz="1400" b="0" i="0">
                 <a:solidFill>
-                  <a:srgbClr val="666666"/>
+                  <a:srgbClr val="26231F"/>
                 </a:solidFill>
               </a:rPr>
               <a:t>고맙습니다 · 가족 이름</a:t>
@@ -5751,34 +6062,34 @@
         <a:sysClr val="window" lastClr="FFFFFF"/>
       </a:lt1>
       <a:dk2>
-        <a:srgbClr val="115F5B"/>
+        <a:srgbClr val="274938"/>
       </a:dk2>
       <a:lt2>
-        <a:srgbClr val="EEFCFB"/>
+        <a:srgbClr val="EAFDF4"/>
       </a:lt2>
       <a:accent1>
-        <a:srgbClr val="26C5BD"/>
+        <a:srgbClr val="7BEAB3"/>
       </a:accent1>
       <a:accent2>
-        <a:srgbClr val="209DB6"/>
+        <a:srgbClr val="9FEFED"/>
       </a:accent2>
       <a:accent3>
-        <a:srgbClr val="115F5B"/>
+        <a:srgbClr val="274938"/>
       </a:accent3>
       <a:accent4>
-        <a:srgbClr val="D1FAF8"/>
+        <a:srgbClr val="D1FAE6"/>
       </a:accent4>
       <a:accent5>
-        <a:srgbClr val="23B1BA"/>
+        <a:srgbClr val="8DECD0"/>
       </a:accent5>
       <a:accent6>
-        <a:srgbClr val="709F9D"/>
+        <a:srgbClr val="7D9288"/>
       </a:accent6>
       <a:hlink>
-        <a:srgbClr val="26C5BD"/>
+        <a:srgbClr val="7BEAB3"/>
       </a:hlink>
       <a:folHlink>
-        <a:srgbClr val="115F5B"/>
+        <a:srgbClr val="274938"/>
       </a:folHlink>
     </a:clrScheme>
     <a:fontScheme name="Office">
